--- a/Sentinel_Review.pptx
+++ b/Sentinel_Review.pptx
@@ -5,12 +5,26 @@
     <p:sldMasterId id="2147483648" r:id="rId1"/>
   </p:sldMasterIdLst>
   <p:notesMasterIdLst>
-    <p:notesMasterId r:id="rId5"/>
+    <p:notesMasterId r:id="rId7"/>
   </p:notesMasterIdLst>
   <p:sldIdLst>
     <p:sldId id="256" r:id="rId2"/>
     <p:sldId id="257" r:id="rId3"/>
     <p:sldId id="259" r:id="rId4"/>
+    <p:sldId id="261" r:id="rId5"/>
+    <p:sldId id="262" r:id="rId6"/>
+    <p:sldId id="263" r:id="rId13"/>
+    <p:sldId id="264" r:id="rId14"/>
+    <p:sldId id="265" r:id="rId15"/>
+    <p:sldId id="266" r:id="rId16"/>
+    <p:sldId id="267" r:id="rId17"/>
+    <p:sldId id="268" r:id="rId18"/>
+    <p:sldId id="269" r:id="rId19"/>
+    <p:sldId id="270" r:id="rId20"/>
+    <p:sldId id="271" r:id="rId21"/>
+    <p:sldId id="272" r:id="rId22"/>
+    <p:sldId id="273" r:id="rId23"/>
+    <p:sldId id="274" r:id="rId24"/>
   </p:sldIdLst>
   <p:sldSz cx="12192000" cy="6858000"/>
   <p:notesSz cx="6858000" cy="12192000"/>
@@ -112,6 +126,27 @@
     </p:ext>
   </p:extLst>
 </p:presentation>
+</file>
+
+<file path=ppt/changesInfos/changesInfo1.xml><?xml version="1.0" encoding="utf-8"?>
+<pc:chgInfo xmlns:a="http://schemas.openxmlformats.org/drawingml/2006/main" xmlns:r="http://schemas.openxmlformats.org/officeDocument/2006/relationships" xmlns:ac="http://schemas.microsoft.com/office/drawing/2013/main/command" xmlns:pc="http://schemas.microsoft.com/office/powerpoint/2013/main/command">
+  <pc:docChgLst>
+    <pc:chgData name="varshitha ravuri" userId="fbc461a92fd73b06" providerId="LiveId" clId="{BA2C0348-5EBC-4A53-BFBC-3FDEE565B179}"/>
+    <pc:docChg chg="delSld">
+      <pc:chgData name="varshitha ravuri" userId="fbc461a92fd73b06" providerId="LiveId" clId="{BA2C0348-5EBC-4A53-BFBC-3FDEE565B179}" dt="2026-09-01T08:55:42.334" v="0" actId="2696"/>
+      <pc:docMkLst>
+        <pc:docMk/>
+      </pc:docMkLst>
+      <pc:sldChg chg="del">
+        <pc:chgData name="varshitha ravuri" userId="fbc461a92fd73b06" providerId="LiveId" clId="{BA2C0348-5EBC-4A53-BFBC-3FDEE565B179}" dt="2026-09-01T08:55:42.334" v="0" actId="2696"/>
+        <pc:sldMkLst>
+          <pc:docMk/>
+          <pc:sldMk cId="0" sldId="260"/>
+        </pc:sldMkLst>
+      </pc:sldChg>
+    </pc:docChg>
+  </pc:docChgLst>
+</pc:chgInfo>
 </file>
 
 <file path=ppt/notesMasters/notesMaster1.xml><?xml version="1.0" encoding="utf-8"?>
@@ -1396,6 +1431,1989 @@
 </p:sld>
 </file>
 
+<file path=ppt/slides/slide10.xml><?xml version="1.0" encoding="utf-8"?>
+<p:sld xmlns:a="http://schemas.openxmlformats.org/drawingml/2006/main" xmlns:r="http://schemas.openxmlformats.org/officeDocument/2006/relationships" xmlns:p="http://schemas.openxmlformats.org/presentationml/2006/main">
+  <p:cSld name="Slide 2">
+    <p:bg>
+      <p:bgPr>
+        <a:solidFill>
+          <a:srgbClr val="FFFFFF"/>
+        </a:solidFill>
+        <a:effectLst/>
+      </p:bgPr>
+    </p:bg>
+    <p:spTree>
+      <p:nvGrpSpPr>
+        <p:cNvPr id="1" name=""/>
+        <p:cNvGrpSpPr/>
+        <p:nvPr/>
+      </p:nvGrpSpPr>
+      <p:grpSpPr>
+        <a:xfrm>
+          <a:off x="0" y="0"/>
+          <a:ext cx="0" cy="0"/>
+          <a:chOff x="0" y="0"/>
+          <a:chExt cx="0" cy="0"/>
+        </a:xfrm>
+      </p:grpSpPr>
+      <p:sp>
+        <p:nvSpPr>
+          <p:cNvPr id="3" name="Text 1"/>
+          <p:cNvSpPr/>
+          <p:nvPr/>
+        </p:nvSpPr>
+        <p:spPr>
+          <a:xfrm>
+            <a:off x="720872" y="-122405"/>
+            <a:ext cx="9144000" cy="1188720"/>
+          </a:xfrm>
+          <a:prstGeom prst="rect">
+            <a:avLst/>
+          </a:prstGeom>
+          <a:noFill/>
+          <a:ln/>
+        </p:spPr>
+        <p:txBody>
+          <a:bodyPr wrap="square" rtlCol="0" anchor="ctr"/>
+          <a:lstStyle/>
+          <a:p>
+            <a:pPr marL="0" indent="0">
+              <a:buNone/>
+            </a:pPr>
+            <a:r>
+              <a:rPr lang="en-US" sz="3200" b="1" dirty="0">
+                <a:latin typeface="Cambria" pitchFamily="34" charset="0"/>
+                <a:ea typeface="Cambria" pitchFamily="34" charset="-122"/>
+                <a:cs typeface="Cambria" pitchFamily="34" charset="-120"/>
+              </a:rPr>
+              <a:t>Software Design — System Architecture</a:t>
+            </a:r>
+            <a:endParaRPr lang="en-US" sz="3200" dirty="0"/>
+          </a:p>
+        </p:txBody>
+      </p:sp>
+      <p:pic>
+        <p:nvPicPr>
+          <p:cNvPr id="21" name="Image 0" descr="klh_logo.png">
+            <a:extLst>
+              <a:ext uri="{FF2B5EF4-FFF2-40B4-BE49-F238E27FC236}">
+                <a16:creationId xmlns:a16="http://schemas.microsoft.com/office/drawing/2014/main" id="{818D94E6-D6DF-ECD3-60A4-3FE0A3FBB180}"/>
+              </a:ext>
+            </a:extLst>
+          </p:cNvPr>
+          <p:cNvPicPr>
+            <a:picLocks noChangeAspect="1"/>
+          </p:cNvPicPr>
+          <p:nvPr/>
+        </p:nvPicPr>
+        <p:blipFill>
+          <a:blip r:embed="rId3"/>
+          <a:stretch>
+            <a:fillRect/>
+          </a:stretch>
+        </p:blipFill>
+        <p:spPr>
+          <a:xfrm>
+            <a:off x="10039265" y="160020"/>
+            <a:ext cx="1902045" cy="623871"/>
+          </a:xfrm>
+          <a:prstGeom prst="rect">
+            <a:avLst/>
+          </a:prstGeom>
+        </p:spPr>
+      </p:pic>
+      <p:sp>
+        <p:nvSpPr>
+          <p:cNvPr id="24" name="Body"/>
+          <p:cNvSpPr txBox="1"/>
+          <p:nvPr/>
+        </p:nvSpPr>
+        <p:spPr>
+          <a:xfrm>
+            <a:off x="720872" y="1000000"/>
+            <a:ext cx="10890460" cy="900000"/>
+          </a:xfrm>
+          <a:prstGeom prst="rect">
+            <a:avLst/>
+          </a:prstGeom>
+          <a:noFill/>
+        </p:spPr>
+        <p:txBody>
+          <a:bodyPr wrap="square">
+            <a:normAutofit/>
+          </a:bodyPr>
+          <a:lstStyle/>
+          <a:p>
+            <a:pPr marL="0" indent="0">
+              <a:buNone/>
+            </a:pPr>
+            <a:r>
+              <a:rPr lang="en-US" sz="1400" dirty="0">
+                <a:latin typeface="Calibri"/>
+              </a:rPr>
+              <a:t>End-to-end architecture: client uploads over REST, the engine validates against the data contract, and results are stored in PostgreSQL.</a:t>
+            </a:r>
+          </a:p>
+        </p:txBody>
+      </p:sp>
+      <p:pic>
+        <p:nvPicPr>
+          <p:cNvPr id="25" name="Picture 24" descr="Sentinel-Architecture.png"/>
+          <p:cNvPicPr>
+            <a:picLocks noChangeAspect="1"/>
+          </p:cNvPicPr>
+          <p:nvPr/>
+        </p:nvPicPr>
+        <p:blipFill>
+          <a:blip r:embed="rId2"/>
+          <a:stretch>
+            <a:fillRect/>
+          </a:stretch>
+        </p:blipFill>
+        <p:spPr>
+          <a:xfrm>
+            <a:off x="2456000" y="1950000"/>
+            <a:ext cx="7280000" cy="4550000"/>
+          </a:xfrm>
+          <a:prstGeom prst="rect">
+            <a:avLst/>
+          </a:prstGeom>
+        </p:spPr>
+      </p:pic>
+    </p:spTree>
+  </p:cSld>
+  <p:clrMapOvr>
+    <a:masterClrMapping/>
+  </p:clrMapOvr>
+</p:sld>
+</file>
+
+<file path=ppt/slides/slide11.xml><?xml version="1.0" encoding="utf-8"?>
+<p:sld xmlns:a="http://schemas.openxmlformats.org/drawingml/2006/main" xmlns:r="http://schemas.openxmlformats.org/officeDocument/2006/relationships" xmlns:p="http://schemas.openxmlformats.org/presentationml/2006/main">
+  <p:cSld name="Slide 2">
+    <p:bg>
+      <p:bgPr>
+        <a:solidFill>
+          <a:srgbClr val="FFFFFF"/>
+        </a:solidFill>
+        <a:effectLst/>
+      </p:bgPr>
+    </p:bg>
+    <p:spTree>
+      <p:nvGrpSpPr>
+        <p:cNvPr id="1" name=""/>
+        <p:cNvGrpSpPr/>
+        <p:nvPr/>
+      </p:nvGrpSpPr>
+      <p:grpSpPr>
+        <a:xfrm>
+          <a:off x="0" y="0"/>
+          <a:ext cx="0" cy="0"/>
+          <a:chOff x="0" y="0"/>
+          <a:chExt cx="0" cy="0"/>
+        </a:xfrm>
+      </p:grpSpPr>
+      <p:sp>
+        <p:nvSpPr>
+          <p:cNvPr id="3" name="Text 1"/>
+          <p:cNvSpPr/>
+          <p:nvPr/>
+        </p:nvSpPr>
+        <p:spPr>
+          <a:xfrm>
+            <a:off x="720872" y="-122405"/>
+            <a:ext cx="9144000" cy="1188720"/>
+          </a:xfrm>
+          <a:prstGeom prst="rect">
+            <a:avLst/>
+          </a:prstGeom>
+          <a:noFill/>
+          <a:ln/>
+        </p:spPr>
+        <p:txBody>
+          <a:bodyPr wrap="square" rtlCol="0" anchor="ctr"/>
+          <a:lstStyle/>
+          <a:p>
+            <a:pPr marL="0" indent="0">
+              <a:buNone/>
+            </a:pPr>
+            <a:r>
+              <a:rPr lang="en-US" sz="3200" b="1" dirty="0">
+                <a:latin typeface="Cambria" pitchFamily="34" charset="0"/>
+                <a:ea typeface="Cambria" pitchFamily="34" charset="-122"/>
+                <a:cs typeface="Cambria" pitchFamily="34" charset="-120"/>
+              </a:rPr>
+              <a:t>UML — Class Diagram</a:t>
+            </a:r>
+            <a:endParaRPr lang="en-US" sz="3200" dirty="0"/>
+          </a:p>
+        </p:txBody>
+      </p:sp>
+      <p:pic>
+        <p:nvPicPr>
+          <p:cNvPr id="21" name="Image 0" descr="klh_logo.png">
+            <a:extLst>
+              <a:ext uri="{FF2B5EF4-FFF2-40B4-BE49-F238E27FC236}">
+                <a16:creationId xmlns:a16="http://schemas.microsoft.com/office/drawing/2014/main" id="{818D94E6-D6DF-ECD3-60A4-3FE0A3FBB180}"/>
+              </a:ext>
+            </a:extLst>
+          </p:cNvPr>
+          <p:cNvPicPr>
+            <a:picLocks noChangeAspect="1"/>
+          </p:cNvPicPr>
+          <p:nvPr/>
+        </p:nvPicPr>
+        <p:blipFill>
+          <a:blip r:embed="rId3"/>
+          <a:stretch>
+            <a:fillRect/>
+          </a:stretch>
+        </p:blipFill>
+        <p:spPr>
+          <a:xfrm>
+            <a:off x="10039265" y="160020"/>
+            <a:ext cx="1902045" cy="623871"/>
+          </a:xfrm>
+          <a:prstGeom prst="rect">
+            <a:avLst/>
+          </a:prstGeom>
+        </p:spPr>
+      </p:pic>
+      <p:sp>
+        <p:nvSpPr>
+          <p:cNvPr id="24" name="Body"/>
+          <p:cNvSpPr txBox="1"/>
+          <p:nvPr/>
+        </p:nvSpPr>
+        <p:spPr>
+          <a:xfrm>
+            <a:off x="720872" y="1000000"/>
+            <a:ext cx="10890460" cy="900000"/>
+          </a:xfrm>
+          <a:prstGeom prst="rect">
+            <a:avLst/>
+          </a:prstGeom>
+          <a:noFill/>
+        </p:spPr>
+        <p:txBody>
+          <a:bodyPr wrap="square">
+            <a:normAutofit/>
+          </a:bodyPr>
+          <a:lstStyle/>
+          <a:p>
+            <a:pPr marL="0" indent="0">
+              <a:buNone/>
+            </a:pPr>
+            <a:r>
+              <a:rPr lang="en-US" sz="1400" dirty="0">
+                <a:latin typeface="Calibri"/>
+              </a:rPr>
+              <a:t>Domain model and engine: Dataset and its records, the ValidationRule contract, and the ValidationEngine producing a ValidationResult.</a:t>
+            </a:r>
+          </a:p>
+        </p:txBody>
+      </p:sp>
+      <p:pic>
+        <p:nvPicPr>
+          <p:cNvPr id="25" name="Picture 24" descr="uml.png"/>
+          <p:cNvPicPr>
+            <a:picLocks noChangeAspect="1"/>
+          </p:cNvPicPr>
+          <p:nvPr/>
+        </p:nvPicPr>
+        <p:blipFill>
+          <a:blip r:embed="rId2"/>
+          <a:stretch>
+            <a:fillRect/>
+          </a:stretch>
+        </p:blipFill>
+        <p:spPr>
+          <a:xfrm>
+            <a:off x="2465681" y="1950000"/>
+            <a:ext cx="7260638" cy="4550000"/>
+          </a:xfrm>
+          <a:prstGeom prst="rect">
+            <a:avLst/>
+          </a:prstGeom>
+        </p:spPr>
+      </p:pic>
+    </p:spTree>
+  </p:cSld>
+  <p:clrMapOvr>
+    <a:masterClrMapping/>
+  </p:clrMapOvr>
+</p:sld>
+</file>
+
+<file path=ppt/slides/slide12.xml><?xml version="1.0" encoding="utf-8"?>
+<p:sld xmlns:a="http://schemas.openxmlformats.org/drawingml/2006/main" xmlns:r="http://schemas.openxmlformats.org/officeDocument/2006/relationships" xmlns:p="http://schemas.openxmlformats.org/presentationml/2006/main">
+  <p:cSld name="Slide 2">
+    <p:bg>
+      <p:bgPr>
+        <a:solidFill>
+          <a:srgbClr val="FFFFFF"/>
+        </a:solidFill>
+        <a:effectLst/>
+      </p:bgPr>
+    </p:bg>
+    <p:spTree>
+      <p:nvGrpSpPr>
+        <p:cNvPr id="1" name=""/>
+        <p:cNvGrpSpPr/>
+        <p:nvPr/>
+      </p:nvGrpSpPr>
+      <p:grpSpPr>
+        <a:xfrm>
+          <a:off x="0" y="0"/>
+          <a:ext cx="0" cy="0"/>
+          <a:chOff x="0" y="0"/>
+          <a:chExt cx="0" cy="0"/>
+        </a:xfrm>
+      </p:grpSpPr>
+      <p:sp>
+        <p:nvSpPr>
+          <p:cNvPr id="3" name="Text 1"/>
+          <p:cNvSpPr/>
+          <p:nvPr/>
+        </p:nvSpPr>
+        <p:spPr>
+          <a:xfrm>
+            <a:off x="720872" y="-122405"/>
+            <a:ext cx="9144000" cy="1188720"/>
+          </a:xfrm>
+          <a:prstGeom prst="rect">
+            <a:avLst/>
+          </a:prstGeom>
+          <a:noFill/>
+          <a:ln/>
+        </p:spPr>
+        <p:txBody>
+          <a:bodyPr wrap="square" rtlCol="0" anchor="ctr"/>
+          <a:lstStyle/>
+          <a:p>
+            <a:pPr marL="0" indent="0">
+              <a:buNone/>
+            </a:pPr>
+            <a:r>
+              <a:rPr lang="en-US" sz="3200" b="1" dirty="0">
+                <a:latin typeface="Cambria" pitchFamily="34" charset="0"/>
+                <a:ea typeface="Cambria" pitchFamily="34" charset="-122"/>
+                <a:cs typeface="Cambria" pitchFamily="34" charset="-120"/>
+              </a:rPr>
+              <a:t>Implementation</a:t>
+            </a:r>
+            <a:endParaRPr lang="en-US" sz="3200" dirty="0"/>
+          </a:p>
+        </p:txBody>
+      </p:sp>
+      <p:pic>
+        <p:nvPicPr>
+          <p:cNvPr id="21" name="Image 0" descr="klh_logo.png">
+            <a:extLst>
+              <a:ext uri="{FF2B5EF4-FFF2-40B4-BE49-F238E27FC236}">
+                <a16:creationId xmlns:a16="http://schemas.microsoft.com/office/drawing/2014/main" id="{818D94E6-D6DF-ECD3-60A4-3FE0A3FBB180}"/>
+              </a:ext>
+            </a:extLst>
+          </p:cNvPr>
+          <p:cNvPicPr>
+            <a:picLocks noChangeAspect="1"/>
+          </p:cNvPicPr>
+          <p:nvPr/>
+        </p:nvPicPr>
+        <p:blipFill>
+          <a:blip r:embed="rId3"/>
+          <a:stretch>
+            <a:fillRect/>
+          </a:stretch>
+        </p:blipFill>
+        <p:spPr>
+          <a:xfrm>
+            <a:off x="10039265" y="160020"/>
+            <a:ext cx="1902045" cy="623871"/>
+          </a:xfrm>
+          <a:prstGeom prst="rect">
+            <a:avLst/>
+          </a:prstGeom>
+        </p:spPr>
+      </p:pic>
+      <p:sp>
+        <p:nvSpPr>
+          <p:cNvPr id="24" name="Body"/>
+          <p:cNvSpPr txBox="1"/>
+          <p:nvPr/>
+        </p:nvSpPr>
+        <p:spPr>
+          <a:xfrm>
+            <a:off x="720872" y="1100000"/>
+            <a:ext cx="10890460" cy="1200000"/>
+          </a:xfrm>
+          <a:prstGeom prst="rect">
+            <a:avLst/>
+          </a:prstGeom>
+          <a:noFill/>
+        </p:spPr>
+        <p:txBody>
+          <a:bodyPr wrap="square">
+            <a:normAutofit/>
+          </a:bodyPr>
+          <a:lstStyle/>
+          <a:p>
+            <a:pPr marL="0" indent="0">
+              <a:buNone/>
+            </a:pPr>
+            <a:r>
+              <a:rPr lang="en-US" sz="1500" dirty="0">
+                <a:latin typeface="Calibri"/>
+              </a:rPr>
+              <a:t>Screenshots: Swagger API (/docs), a validation run, and the dashboard.</a:t>
+            </a:r>
+          </a:p>
+          <a:p>
+            <a:pPr marL="0" indent="0">
+              <a:buNone/>
+            </a:pPr>
+            <a:endParaRPr lang="en-US" sz="700"/>
+          </a:p>
+          <a:p>
+            <a:pPr marL="0" indent="0">
+              <a:buNone/>
+            </a:pPr>
+            <a:r>
+              <a:rPr lang="en-US" sz="1400" dirty="0">
+                <a:latin typeface="Calibri"/>
+              </a:rPr>
+              <a:t>[ add screenshots here ]</a:t>
+            </a:r>
+          </a:p>
+        </p:txBody>
+      </p:sp>
+    </p:spTree>
+  </p:cSld>
+  <p:clrMapOvr>
+    <a:masterClrMapping/>
+  </p:clrMapOvr>
+</p:sld>
+</file>
+
+<file path=ppt/slides/slide13.xml><?xml version="1.0" encoding="utf-8"?>
+<p:sld xmlns:a="http://schemas.openxmlformats.org/drawingml/2006/main" xmlns:r="http://schemas.openxmlformats.org/officeDocument/2006/relationships" xmlns:p="http://schemas.openxmlformats.org/presentationml/2006/main">
+  <p:cSld name="Slide 2">
+    <p:bg>
+      <p:bgPr>
+        <a:solidFill>
+          <a:srgbClr val="FFFFFF"/>
+        </a:solidFill>
+        <a:effectLst/>
+      </p:bgPr>
+    </p:bg>
+    <p:spTree>
+      <p:nvGrpSpPr>
+        <p:cNvPr id="1" name=""/>
+        <p:cNvGrpSpPr/>
+        <p:nvPr/>
+      </p:nvGrpSpPr>
+      <p:grpSpPr>
+        <a:xfrm>
+          <a:off x="0" y="0"/>
+          <a:ext cx="0" cy="0"/>
+          <a:chOff x="0" y="0"/>
+          <a:chExt cx="0" cy="0"/>
+        </a:xfrm>
+      </p:grpSpPr>
+      <p:sp>
+        <p:nvSpPr>
+          <p:cNvPr id="3" name="Text 1"/>
+          <p:cNvSpPr/>
+          <p:nvPr/>
+        </p:nvSpPr>
+        <p:spPr>
+          <a:xfrm>
+            <a:off x="720872" y="-122405"/>
+            <a:ext cx="9144000" cy="1188720"/>
+          </a:xfrm>
+          <a:prstGeom prst="rect">
+            <a:avLst/>
+          </a:prstGeom>
+          <a:noFill/>
+          <a:ln/>
+        </p:spPr>
+        <p:txBody>
+          <a:bodyPr wrap="square" rtlCol="0" anchor="ctr"/>
+          <a:lstStyle/>
+          <a:p>
+            <a:pPr marL="0" indent="0">
+              <a:buNone/>
+            </a:pPr>
+            <a:r>
+              <a:rPr lang="en-US" sz="3200" b="1" dirty="0">
+                <a:latin typeface="Cambria" pitchFamily="34" charset="0"/>
+                <a:ea typeface="Cambria" pitchFamily="34" charset="-122"/>
+                <a:cs typeface="Cambria" pitchFamily="34" charset="-120"/>
+              </a:rPr>
+              <a:t>Implementation — Architecture</a:t>
+            </a:r>
+            <a:endParaRPr lang="en-US" sz="3200" dirty="0"/>
+          </a:p>
+        </p:txBody>
+      </p:sp>
+      <p:pic>
+        <p:nvPicPr>
+          <p:cNvPr id="21" name="Image 0" descr="klh_logo.png">
+            <a:extLst>
+              <a:ext uri="{FF2B5EF4-FFF2-40B4-BE49-F238E27FC236}">
+                <a16:creationId xmlns:a16="http://schemas.microsoft.com/office/drawing/2014/main" id="{818D94E6-D6DF-ECD3-60A4-3FE0A3FBB180}"/>
+              </a:ext>
+            </a:extLst>
+          </p:cNvPr>
+          <p:cNvPicPr>
+            <a:picLocks noChangeAspect="1"/>
+          </p:cNvPicPr>
+          <p:nvPr/>
+        </p:nvPicPr>
+        <p:blipFill>
+          <a:blip r:embed="rId3"/>
+          <a:stretch>
+            <a:fillRect/>
+          </a:stretch>
+        </p:blipFill>
+        <p:spPr>
+          <a:xfrm>
+            <a:off x="10039265" y="160020"/>
+            <a:ext cx="1902045" cy="623871"/>
+          </a:xfrm>
+          <a:prstGeom prst="rect">
+            <a:avLst/>
+          </a:prstGeom>
+        </p:spPr>
+      </p:pic>
+      <p:sp>
+        <p:nvSpPr>
+          <p:cNvPr id="24" name="Body"/>
+          <p:cNvSpPr txBox="1"/>
+          <p:nvPr/>
+        </p:nvSpPr>
+        <p:spPr>
+          <a:xfrm>
+            <a:off x="720872" y="1100000"/>
+            <a:ext cx="10890460" cy="1200000"/>
+          </a:xfrm>
+          <a:prstGeom prst="rect">
+            <a:avLst/>
+          </a:prstGeom>
+          <a:noFill/>
+        </p:spPr>
+        <p:txBody>
+          <a:bodyPr wrap="square">
+            <a:normAutofit/>
+          </a:bodyPr>
+          <a:lstStyle/>
+          <a:p>
+            <a:pPr marL="0" indent="0">
+              <a:buNone/>
+            </a:pPr>
+            <a:r>
+              <a:rPr lang="en-US" sz="1500" dirty="0">
+                <a:latin typeface="Calibri"/>
+              </a:rPr>
+              <a:t>Screenshots: containers running (Docker), API + database wired, endpoints live.</a:t>
+            </a:r>
+          </a:p>
+          <a:p>
+            <a:pPr marL="0" indent="0">
+              <a:buNone/>
+            </a:pPr>
+            <a:endParaRPr lang="en-US" sz="700"/>
+          </a:p>
+          <a:p>
+            <a:pPr marL="0" indent="0">
+              <a:buNone/>
+            </a:pPr>
+            <a:r>
+              <a:rPr lang="en-US" sz="1400" dirty="0">
+                <a:latin typeface="Calibri"/>
+              </a:rPr>
+              <a:t>[ add screenshots here ]</a:t>
+            </a:r>
+          </a:p>
+        </p:txBody>
+      </p:sp>
+    </p:spTree>
+  </p:cSld>
+  <p:clrMapOvr>
+    <a:masterClrMapping/>
+  </p:clrMapOvr>
+</p:sld>
+</file>
+
+<file path=ppt/slides/slide14.xml><?xml version="1.0" encoding="utf-8"?>
+<p:sld xmlns:a="http://schemas.openxmlformats.org/drawingml/2006/main" xmlns:r="http://schemas.openxmlformats.org/officeDocument/2006/relationships" xmlns:p="http://schemas.openxmlformats.org/presentationml/2006/main">
+  <p:cSld name="Slide 2">
+    <p:bg>
+      <p:bgPr>
+        <a:solidFill>
+          <a:srgbClr val="FFFFFF"/>
+        </a:solidFill>
+        <a:effectLst/>
+      </p:bgPr>
+    </p:bg>
+    <p:spTree>
+      <p:nvGrpSpPr>
+        <p:cNvPr id="1" name=""/>
+        <p:cNvGrpSpPr/>
+        <p:nvPr/>
+      </p:nvGrpSpPr>
+      <p:grpSpPr>
+        <a:xfrm>
+          <a:off x="0" y="0"/>
+          <a:ext cx="0" cy="0"/>
+          <a:chOff x="0" y="0"/>
+          <a:chExt cx="0" cy="0"/>
+        </a:xfrm>
+      </p:grpSpPr>
+      <p:sp>
+        <p:nvSpPr>
+          <p:cNvPr id="3" name="Text 1"/>
+          <p:cNvSpPr/>
+          <p:nvPr/>
+        </p:nvSpPr>
+        <p:spPr>
+          <a:xfrm>
+            <a:off x="720872" y="-122405"/>
+            <a:ext cx="9144000" cy="1188720"/>
+          </a:xfrm>
+          <a:prstGeom prst="rect">
+            <a:avLst/>
+          </a:prstGeom>
+          <a:noFill/>
+          <a:ln/>
+        </p:spPr>
+        <p:txBody>
+          <a:bodyPr wrap="square" rtlCol="0" anchor="ctr"/>
+          <a:lstStyle/>
+          <a:p>
+            <a:pPr marL="0" indent="0">
+              <a:buNone/>
+            </a:pPr>
+            <a:r>
+              <a:rPr lang="en-US" sz="3200" b="1" dirty="0">
+                <a:latin typeface="Cambria" pitchFamily="34" charset="0"/>
+                <a:ea typeface="Cambria" pitchFamily="34" charset="-122"/>
+                <a:cs typeface="Cambria" pitchFamily="34" charset="-120"/>
+              </a:rPr>
+              <a:t>Results</a:t>
+            </a:r>
+            <a:endParaRPr lang="en-US" sz="3200" dirty="0"/>
+          </a:p>
+        </p:txBody>
+      </p:sp>
+      <p:pic>
+        <p:nvPicPr>
+          <p:cNvPr id="21" name="Image 0" descr="klh_logo.png">
+            <a:extLst>
+              <a:ext uri="{FF2B5EF4-FFF2-40B4-BE49-F238E27FC236}">
+                <a16:creationId xmlns:a16="http://schemas.microsoft.com/office/drawing/2014/main" id="{818D94E6-D6DF-ECD3-60A4-3FE0A3FBB180}"/>
+              </a:ext>
+            </a:extLst>
+          </p:cNvPr>
+          <p:cNvPicPr>
+            <a:picLocks noChangeAspect="1"/>
+          </p:cNvPicPr>
+          <p:nvPr/>
+        </p:nvPicPr>
+        <p:blipFill>
+          <a:blip r:embed="rId3"/>
+          <a:stretch>
+            <a:fillRect/>
+          </a:stretch>
+        </p:blipFill>
+        <p:spPr>
+          <a:xfrm>
+            <a:off x="10039265" y="160020"/>
+            <a:ext cx="1902045" cy="623871"/>
+          </a:xfrm>
+          <a:prstGeom prst="rect">
+            <a:avLst/>
+          </a:prstGeom>
+        </p:spPr>
+      </p:pic>
+      <p:sp>
+        <p:nvSpPr>
+          <p:cNvPr id="24" name="Body"/>
+          <p:cNvSpPr txBox="1"/>
+          <p:nvPr/>
+        </p:nvSpPr>
+        <p:spPr>
+          <a:xfrm>
+            <a:off x="720872" y="1100000"/>
+            <a:ext cx="10890460" cy="1200000"/>
+          </a:xfrm>
+          <a:prstGeom prst="rect">
+            <a:avLst/>
+          </a:prstGeom>
+          <a:noFill/>
+        </p:spPr>
+        <p:txBody>
+          <a:bodyPr wrap="square">
+            <a:normAutofit/>
+          </a:bodyPr>
+          <a:lstStyle/>
+          <a:p>
+            <a:pPr marL="0" indent="0">
+              <a:buNone/>
+            </a:pPr>
+            <a:r>
+              <a:rPr lang="en-US" sz="1500" dirty="0">
+                <a:latin typeface="Calibri"/>
+              </a:rPr>
+              <a:t>Add validation-run results: total rows, valid, invalid, health score, most common error.</a:t>
+            </a:r>
+          </a:p>
+          <a:p>
+            <a:pPr marL="0" indent="0">
+              <a:buNone/>
+            </a:pPr>
+            <a:endParaRPr lang="en-US" sz="700"/>
+          </a:p>
+          <a:p>
+            <a:pPr marL="0" indent="0">
+              <a:buNone/>
+            </a:pPr>
+            <a:r>
+              <a:rPr lang="en-US" sz="1400" dirty="0">
+                <a:latin typeface="Calibri"/>
+              </a:rPr>
+              <a:t>[ add screenshots here ]</a:t>
+            </a:r>
+          </a:p>
+        </p:txBody>
+      </p:sp>
+    </p:spTree>
+  </p:cSld>
+  <p:clrMapOvr>
+    <a:masterClrMapping/>
+  </p:clrMapOvr>
+</p:sld>
+</file>
+
+<file path=ppt/slides/slide15.xml><?xml version="1.0" encoding="utf-8"?>
+<p:sld xmlns:a="http://schemas.openxmlformats.org/drawingml/2006/main" xmlns:r="http://schemas.openxmlformats.org/officeDocument/2006/relationships" xmlns:p="http://schemas.openxmlformats.org/presentationml/2006/main">
+  <p:cSld name="Slide 2">
+    <p:bg>
+      <p:bgPr>
+        <a:solidFill>
+          <a:srgbClr val="FFFFFF"/>
+        </a:solidFill>
+        <a:effectLst/>
+      </p:bgPr>
+    </p:bg>
+    <p:spTree>
+      <p:nvGrpSpPr>
+        <p:cNvPr id="1" name=""/>
+        <p:cNvGrpSpPr/>
+        <p:nvPr/>
+      </p:nvGrpSpPr>
+      <p:grpSpPr>
+        <a:xfrm>
+          <a:off x="0" y="0"/>
+          <a:ext cx="0" cy="0"/>
+          <a:chOff x="0" y="0"/>
+          <a:chExt cx="0" cy="0"/>
+        </a:xfrm>
+      </p:grpSpPr>
+      <p:sp>
+        <p:nvSpPr>
+          <p:cNvPr id="3" name="Text 1"/>
+          <p:cNvSpPr/>
+          <p:nvPr/>
+        </p:nvSpPr>
+        <p:spPr>
+          <a:xfrm>
+            <a:off x="720872" y="-122405"/>
+            <a:ext cx="9144000" cy="1188720"/>
+          </a:xfrm>
+          <a:prstGeom prst="rect">
+            <a:avLst/>
+          </a:prstGeom>
+          <a:noFill/>
+          <a:ln/>
+        </p:spPr>
+        <p:txBody>
+          <a:bodyPr wrap="square" rtlCol="0" anchor="ctr"/>
+          <a:lstStyle/>
+          <a:p>
+            <a:pPr marL="0" indent="0">
+              <a:buNone/>
+            </a:pPr>
+            <a:r>
+              <a:rPr lang="en-US" sz="3200" b="1" dirty="0">
+                <a:latin typeface="Cambria" pitchFamily="34" charset="0"/>
+                <a:ea typeface="Cambria" pitchFamily="34" charset="-122"/>
+                <a:cs typeface="Cambria" pitchFamily="34" charset="-120"/>
+              </a:rPr>
+              <a:t>Comparison</a:t>
+            </a:r>
+            <a:endParaRPr lang="en-US" sz="3200" dirty="0"/>
+          </a:p>
+        </p:txBody>
+      </p:sp>
+      <p:pic>
+        <p:nvPicPr>
+          <p:cNvPr id="21" name="Image 0" descr="klh_logo.png">
+            <a:extLst>
+              <a:ext uri="{FF2B5EF4-FFF2-40B4-BE49-F238E27FC236}">
+                <a16:creationId xmlns:a16="http://schemas.microsoft.com/office/drawing/2014/main" id="{818D94E6-D6DF-ECD3-60A4-3FE0A3FBB180}"/>
+              </a:ext>
+            </a:extLst>
+          </p:cNvPr>
+          <p:cNvPicPr>
+            <a:picLocks noChangeAspect="1"/>
+          </p:cNvPicPr>
+          <p:nvPr/>
+        </p:nvPicPr>
+        <p:blipFill>
+          <a:blip r:embed="rId3"/>
+          <a:stretch>
+            <a:fillRect/>
+          </a:stretch>
+        </p:blipFill>
+        <p:spPr>
+          <a:xfrm>
+            <a:off x="10039265" y="160020"/>
+            <a:ext cx="1902045" cy="623871"/>
+          </a:xfrm>
+          <a:prstGeom prst="rect">
+            <a:avLst/>
+          </a:prstGeom>
+        </p:spPr>
+      </p:pic>
+      <p:graphicFrame>
+        <p:nvGraphicFramePr>
+          <p:cNvPr id="40" name="Tbl"/>
+          <p:cNvGraphicFramePr/>
+          <p:nvPr/>
+        </p:nvGraphicFramePr>
+        <p:xfrm>
+          <a:off x="720872" y="1000000"/>
+          <a:ext cx="10890460" cy="5000000"/>
+        </p:xfrm>
+        <a:graphic>
+          <a:graphicData uri="http://schemas.openxmlformats.org/drawingml/2006/table">
+            <a:tbl>
+              <a:tblPr firstRow="1">
+                <a:tableStyleId>{5940675A-B579-460E-94D1-54222C63F5DA}</a:tableStyleId>
+              </a:tblPr>
+              <a:tblGrid>
+                <a:gridCol w="2650000"/>
+                <a:gridCol w="2060000"/>
+                <a:gridCol w="2060000"/>
+                <a:gridCol w="2060000"/>
+                <a:gridCol w="2060460"/>
+              </a:tblGrid>
+              <a:tr h="420000">
+                <a:tc>
+                  <a:txBody>
+                    <a:bodyPr/>
+                    <a:lstStyle/>
+                    <a:p>
+                      <a:pPr algn="ctr"/>
+                      <a:r>
+                        <a:rPr lang="en-US" sz="1150" b="1" dirty="0">
+                          <a:solidFill>
+                            <a:srgbClr val="FFFFFF"/>
+                          </a:solidFill>
+                          <a:latin typeface="Cambria"/>
+                        </a:rPr>
+                        <a:t>Aspect</a:t>
+                      </a:r>
+                    </a:p>
+                  </a:txBody>
+                  <a:tcPr marL="54000" marR="54000" marT="24000" marB="24000" anchor="ctr">
+                    <a:solidFill>
+                      <a:srgbClr val="8C1D40"/>
+                    </a:solidFill>
+                  </a:tcPr>
+                </a:tc>
+                <a:tc>
+                  <a:txBody>
+                    <a:bodyPr/>
+                    <a:lstStyle/>
+                    <a:p>
+                      <a:pPr algn="ctr"/>
+                      <a:r>
+                        <a:rPr lang="en-US" sz="1150" b="1" dirty="0">
+                          <a:solidFill>
+                            <a:srgbClr val="FFFFFF"/>
+                          </a:solidFill>
+                          <a:latin typeface="Cambria"/>
+                        </a:rPr>
+                        <a:t>Sentinel</a:t>
+                      </a:r>
+                    </a:p>
+                  </a:txBody>
+                  <a:tcPr marL="54000" marR="54000" marT="24000" marB="24000" anchor="ctr">
+                    <a:solidFill>
+                      <a:srgbClr val="8C1D40"/>
+                    </a:solidFill>
+                  </a:tcPr>
+                </a:tc>
+                <a:tc>
+                  <a:txBody>
+                    <a:bodyPr/>
+                    <a:lstStyle/>
+                    <a:p>
+                      <a:pPr algn="ctr"/>
+                      <a:r>
+                        <a:rPr lang="en-US" sz="1150" b="1" dirty="0">
+                          <a:solidFill>
+                            <a:srgbClr val="FFFFFF"/>
+                          </a:solidFill>
+                          <a:latin typeface="Cambria"/>
+                        </a:rPr>
+                        <a:t>Deequ</a:t>
+                      </a:r>
+                    </a:p>
+                  </a:txBody>
+                  <a:tcPr marL="54000" marR="54000" marT="24000" marB="24000" anchor="ctr">
+                    <a:solidFill>
+                      <a:srgbClr val="8C1D40"/>
+                    </a:solidFill>
+                  </a:tcPr>
+                </a:tc>
+                <a:tc>
+                  <a:txBody>
+                    <a:bodyPr/>
+                    <a:lstStyle/>
+                    <a:p>
+                      <a:pPr algn="ctr"/>
+                      <a:r>
+                        <a:rPr lang="en-US" sz="1150" b="1" dirty="0">
+                          <a:solidFill>
+                            <a:srgbClr val="FFFFFF"/>
+                          </a:solidFill>
+                          <a:latin typeface="Cambria"/>
+                        </a:rPr>
+                        <a:t>TFDV</a:t>
+                      </a:r>
+                    </a:p>
+                  </a:txBody>
+                  <a:tcPr marL="54000" marR="54000" marT="24000" marB="24000" anchor="ctr">
+                    <a:solidFill>
+                      <a:srgbClr val="8C1D40"/>
+                    </a:solidFill>
+                  </a:tcPr>
+                </a:tc>
+                <a:tc>
+                  <a:txBody>
+                    <a:bodyPr/>
+                    <a:lstStyle/>
+                    <a:p>
+                      <a:pPr algn="ctr"/>
+                      <a:r>
+                        <a:rPr lang="en-US" sz="1150" b="1" dirty="0">
+                          <a:solidFill>
+                            <a:srgbClr val="FFFFFF"/>
+                          </a:solidFill>
+                          <a:latin typeface="Cambria"/>
+                        </a:rPr>
+                        <a:t>Great Expectations</a:t>
+                      </a:r>
+                    </a:p>
+                  </a:txBody>
+                  <a:tcPr marL="54000" marR="54000" marT="24000" marB="24000" anchor="ctr">
+                    <a:solidFill>
+                      <a:srgbClr val="8C1D40"/>
+                    </a:solidFill>
+                  </a:tcPr>
+                </a:tc>
+              </a:tr>
+              <a:tr h="520000">
+                <a:tc>
+                  <a:txBody>
+                    <a:bodyPr/>
+                    <a:lstStyle/>
+                    <a:p>
+                      <a:pPr/>
+                      <a:r>
+                        <a:rPr lang="en-US" sz="1050" dirty="0">
+                          <a:latin typeface="Calibri"/>
+                        </a:rPr>
+                        <a:t>Approach</a:t>
+                      </a:r>
+                    </a:p>
+                  </a:txBody>
+                  <a:tcPr marL="54000" marR="54000" marT="24000" marB="24000" anchor="ctr"/>
+                </a:tc>
+                <a:tc>
+                  <a:txBody>
+                    <a:bodyPr/>
+                    <a:lstStyle/>
+                    <a:p>
+                      <a:pPr/>
+                      <a:r>
+                        <a:rPr lang="en-US" sz="1050" dirty="0">
+                          <a:latin typeface="Calibri"/>
+                        </a:rPr>
+                        <a:t>Declarative contracts</a:t>
+                      </a:r>
+                    </a:p>
+                  </a:txBody>
+                  <a:tcPr marL="54000" marR="54000" marT="24000" marB="24000" anchor="ctr"/>
+                </a:tc>
+                <a:tc>
+                  <a:txBody>
+                    <a:bodyPr/>
+                    <a:lstStyle/>
+                    <a:p>
+                      <a:pPr/>
+                      <a:r>
+                        <a:rPr lang="en-US" sz="1050" dirty="0">
+                          <a:latin typeface="Calibri"/>
+                        </a:rPr>
+                        <a:t>Declarative constraints</a:t>
+                      </a:r>
+                    </a:p>
+                  </a:txBody>
+                  <a:tcPr marL="54000" marR="54000" marT="24000" marB="24000" anchor="ctr"/>
+                </a:tc>
+                <a:tc>
+                  <a:txBody>
+                    <a:bodyPr/>
+                    <a:lstStyle/>
+                    <a:p>
+                      <a:pPr/>
+                      <a:r>
+                        <a:rPr lang="en-US" sz="1050" dirty="0">
+                          <a:latin typeface="Calibri"/>
+                        </a:rPr>
+                        <a:t>Schema-based</a:t>
+                      </a:r>
+                    </a:p>
+                  </a:txBody>
+                  <a:tcPr marL="54000" marR="54000" marT="24000" marB="24000" anchor="ctr"/>
+                </a:tc>
+                <a:tc>
+                  <a:txBody>
+                    <a:bodyPr/>
+                    <a:lstStyle/>
+                    <a:p>
+                      <a:pPr/>
+                      <a:r>
+                        <a:rPr lang="en-US" sz="1050" dirty="0">
+                          <a:latin typeface="Calibri"/>
+                        </a:rPr>
+                        <a:t>Expectation suites</a:t>
+                      </a:r>
+                    </a:p>
+                  </a:txBody>
+                  <a:tcPr marL="54000" marR="54000" marT="24000" marB="24000" anchor="ctr"/>
+                </a:tc>
+              </a:tr>
+              <a:tr h="520000">
+                <a:tc>
+                  <a:txBody>
+                    <a:bodyPr/>
+                    <a:lstStyle/>
+                    <a:p>
+                      <a:pPr/>
+                      <a:r>
+                        <a:rPr lang="en-US" sz="1050" dirty="0">
+                          <a:latin typeface="Calibri"/>
+                        </a:rPr>
+                        <a:t>Infrastructure</a:t>
+                      </a:r>
+                    </a:p>
+                  </a:txBody>
+                  <a:tcPr marL="54000" marR="54000" marT="24000" marB="24000" anchor="ctr"/>
+                </a:tc>
+                <a:tc>
+                  <a:txBody>
+                    <a:bodyPr/>
+                    <a:lstStyle/>
+                    <a:p>
+                      <a:pPr/>
+                      <a:r>
+                        <a:rPr lang="en-US" sz="1050" dirty="0">
+                          <a:latin typeface="Calibri"/>
+                        </a:rPr>
+                        <a:t>Docker only</a:t>
+                      </a:r>
+                    </a:p>
+                  </a:txBody>
+                  <a:tcPr marL="54000" marR="54000" marT="24000" marB="24000" anchor="ctr"/>
+                </a:tc>
+                <a:tc>
+                  <a:txBody>
+                    <a:bodyPr/>
+                    <a:lstStyle/>
+                    <a:p>
+                      <a:pPr/>
+                      <a:r>
+                        <a:rPr lang="en-US" sz="1050" dirty="0">
+                          <a:latin typeface="Calibri"/>
+                        </a:rPr>
+                        <a:t>Spark</a:t>
+                      </a:r>
+                    </a:p>
+                  </a:txBody>
+                  <a:tcPr marL="54000" marR="54000" marT="24000" marB="24000" anchor="ctr"/>
+                </a:tc>
+                <a:tc>
+                  <a:txBody>
+                    <a:bodyPr/>
+                    <a:lstStyle/>
+                    <a:p>
+                      <a:pPr/>
+                      <a:r>
+                        <a:rPr lang="en-US" sz="1050" dirty="0">
+                          <a:latin typeface="Calibri"/>
+                        </a:rPr>
+                        <a:t>TensorFlow/TFX</a:t>
+                      </a:r>
+                    </a:p>
+                  </a:txBody>
+                  <a:tcPr marL="54000" marR="54000" marT="24000" marB="24000" anchor="ctr"/>
+                </a:tc>
+                <a:tc>
+                  <a:txBody>
+                    <a:bodyPr/>
+                    <a:lstStyle/>
+                    <a:p>
+                      <a:pPr/>
+                      <a:r>
+                        <a:rPr lang="en-US" sz="1050" dirty="0">
+                          <a:latin typeface="Calibri"/>
+                        </a:rPr>
+                        <a:t>Python</a:t>
+                      </a:r>
+                    </a:p>
+                  </a:txBody>
+                  <a:tcPr marL="54000" marR="54000" marT="24000" marB="24000" anchor="ctr"/>
+                </a:tc>
+              </a:tr>
+              <a:tr h="520000">
+                <a:tc>
+                  <a:txBody>
+                    <a:bodyPr/>
+                    <a:lstStyle/>
+                    <a:p>
+                      <a:pPr/>
+                      <a:r>
+                        <a:rPr lang="en-US" sz="1050" dirty="0">
+                          <a:latin typeface="Calibri"/>
+                        </a:rPr>
+                        <a:t>Per-row failure reason</a:t>
+                      </a:r>
+                    </a:p>
+                  </a:txBody>
+                  <a:tcPr marL="54000" marR="54000" marT="24000" marB="24000" anchor="ctr"/>
+                </a:tc>
+                <a:tc>
+                  <a:txBody>
+                    <a:bodyPr/>
+                    <a:lstStyle/>
+                    <a:p>
+                      <a:pPr/>
+                      <a:r>
+                        <a:rPr lang="en-US" sz="1050" dirty="0">
+                          <a:latin typeface="Calibri"/>
+                        </a:rPr>
+                        <a:t>Yes</a:t>
+                      </a:r>
+                    </a:p>
+                  </a:txBody>
+                  <a:tcPr marL="54000" marR="54000" marT="24000" marB="24000" anchor="ctr"/>
+                </a:tc>
+                <a:tc>
+                  <a:txBody>
+                    <a:bodyPr/>
+                    <a:lstStyle/>
+                    <a:p>
+                      <a:pPr/>
+                      <a:r>
+                        <a:rPr lang="en-US" sz="1050" dirty="0">
+                          <a:latin typeface="Calibri"/>
+                        </a:rPr>
+                        <a:t>Limited</a:t>
+                      </a:r>
+                    </a:p>
+                  </a:txBody>
+                  <a:tcPr marL="54000" marR="54000" marT="24000" marB="24000" anchor="ctr"/>
+                </a:tc>
+                <a:tc>
+                  <a:txBody>
+                    <a:bodyPr/>
+                    <a:lstStyle/>
+                    <a:p>
+                      <a:pPr/>
+                      <a:r>
+                        <a:rPr lang="en-US" sz="1050" dirty="0">
+                          <a:latin typeface="Calibri"/>
+                        </a:rPr>
+                        <a:t>Limited</a:t>
+                      </a:r>
+                    </a:p>
+                  </a:txBody>
+                  <a:tcPr marL="54000" marR="54000" marT="24000" marB="24000" anchor="ctr"/>
+                </a:tc>
+                <a:tc>
+                  <a:txBody>
+                    <a:bodyPr/>
+                    <a:lstStyle/>
+                    <a:p>
+                      <a:pPr/>
+                      <a:r>
+                        <a:rPr lang="en-US" sz="1050" dirty="0">
+                          <a:latin typeface="Calibri"/>
+                        </a:rPr>
+                        <a:t>Partial</a:t>
+                      </a:r>
+                    </a:p>
+                  </a:txBody>
+                  <a:tcPr marL="54000" marR="54000" marT="24000" marB="24000" anchor="ctr"/>
+                </a:tc>
+              </a:tr>
+              <a:tr h="520000">
+                <a:tc>
+                  <a:txBody>
+                    <a:bodyPr/>
+                    <a:lstStyle/>
+                    <a:p>
+                      <a:pPr/>
+                      <a:r>
+                        <a:rPr lang="en-US" sz="1050" dirty="0">
+                          <a:latin typeface="Calibri"/>
+                        </a:rPr>
+                        <a:t>Quarantine bad rows</a:t>
+                      </a:r>
+                    </a:p>
+                  </a:txBody>
+                  <a:tcPr marL="54000" marR="54000" marT="24000" marB="24000" anchor="ctr"/>
+                </a:tc>
+                <a:tc>
+                  <a:txBody>
+                    <a:bodyPr/>
+                    <a:lstStyle/>
+                    <a:p>
+                      <a:pPr/>
+                      <a:r>
+                        <a:rPr lang="en-US" sz="1050" dirty="0">
+                          <a:latin typeface="Calibri"/>
+                        </a:rPr>
+                        <a:t>Yes</a:t>
+                      </a:r>
+                    </a:p>
+                  </a:txBody>
+                  <a:tcPr marL="54000" marR="54000" marT="24000" marB="24000" anchor="ctr"/>
+                </a:tc>
+                <a:tc>
+                  <a:txBody>
+                    <a:bodyPr/>
+                    <a:lstStyle/>
+                    <a:p>
+                      <a:pPr/>
+                      <a:r>
+                        <a:rPr lang="en-US" sz="1050" dirty="0">
+                          <a:latin typeface="Calibri"/>
+                        </a:rPr>
+                        <a:t>No</a:t>
+                      </a:r>
+                    </a:p>
+                  </a:txBody>
+                  <a:tcPr marL="54000" marR="54000" marT="24000" marB="24000" anchor="ctr"/>
+                </a:tc>
+                <a:tc>
+                  <a:txBody>
+                    <a:bodyPr/>
+                    <a:lstStyle/>
+                    <a:p>
+                      <a:pPr/>
+                      <a:r>
+                        <a:rPr lang="en-US" sz="1050" dirty="0">
+                          <a:latin typeface="Calibri"/>
+                        </a:rPr>
+                        <a:t>No</a:t>
+                      </a:r>
+                    </a:p>
+                  </a:txBody>
+                  <a:tcPr marL="54000" marR="54000" marT="24000" marB="24000" anchor="ctr"/>
+                </a:tc>
+                <a:tc>
+                  <a:txBody>
+                    <a:bodyPr/>
+                    <a:lstStyle/>
+                    <a:p>
+                      <a:pPr/>
+                      <a:r>
+                        <a:rPr lang="en-US" sz="1050" dirty="0">
+                          <a:latin typeface="Calibri"/>
+                        </a:rPr>
+                        <a:t>No</a:t>
+                      </a:r>
+                    </a:p>
+                  </a:txBody>
+                  <a:tcPr marL="54000" marR="54000" marT="24000" marB="24000" anchor="ctr"/>
+                </a:tc>
+              </a:tr>
+              <a:tr h="520000">
+                <a:tc>
+                  <a:txBody>
+                    <a:bodyPr/>
+                    <a:lstStyle/>
+                    <a:p>
+                      <a:pPr/>
+                      <a:r>
+                        <a:rPr lang="en-US" sz="1050" dirty="0">
+                          <a:latin typeface="Calibri"/>
+                        </a:rPr>
+                        <a:t>Health score</a:t>
+                      </a:r>
+                    </a:p>
+                  </a:txBody>
+                  <a:tcPr marL="54000" marR="54000" marT="24000" marB="24000" anchor="ctr"/>
+                </a:tc>
+                <a:tc>
+                  <a:txBody>
+                    <a:bodyPr/>
+                    <a:lstStyle/>
+                    <a:p>
+                      <a:pPr/>
+                      <a:r>
+                        <a:rPr lang="en-US" sz="1050" dirty="0">
+                          <a:latin typeface="Calibri"/>
+                        </a:rPr>
+                        <a:t>Yes</a:t>
+                      </a:r>
+                    </a:p>
+                  </a:txBody>
+                  <a:tcPr marL="54000" marR="54000" marT="24000" marB="24000" anchor="ctr"/>
+                </a:tc>
+                <a:tc>
+                  <a:txBody>
+                    <a:bodyPr/>
+                    <a:lstStyle/>
+                    <a:p>
+                      <a:pPr/>
+                      <a:r>
+                        <a:rPr lang="en-US" sz="1050" dirty="0">
+                          <a:latin typeface="Calibri"/>
+                        </a:rPr>
+                        <a:t>Metrics</a:t>
+                      </a:r>
+                    </a:p>
+                  </a:txBody>
+                  <a:tcPr marL="54000" marR="54000" marT="24000" marB="24000" anchor="ctr"/>
+                </a:tc>
+                <a:tc>
+                  <a:txBody>
+                    <a:bodyPr/>
+                    <a:lstStyle/>
+                    <a:p>
+                      <a:pPr/>
+                      <a:r>
+                        <a:rPr lang="en-US" sz="1050" dirty="0">
+                          <a:latin typeface="Calibri"/>
+                        </a:rPr>
+                        <a:t>Anomalies</a:t>
+                      </a:r>
+                    </a:p>
+                  </a:txBody>
+                  <a:tcPr marL="54000" marR="54000" marT="24000" marB="24000" anchor="ctr"/>
+                </a:tc>
+                <a:tc>
+                  <a:txBody>
+                    <a:bodyPr/>
+                    <a:lstStyle/>
+                    <a:p>
+                      <a:pPr/>
+                      <a:r>
+                        <a:rPr lang="en-US" sz="1050" dirty="0">
+                          <a:latin typeface="Calibri"/>
+                        </a:rPr>
+                        <a:t>Validation results</a:t>
+                      </a:r>
+                    </a:p>
+                  </a:txBody>
+                  <a:tcPr marL="54000" marR="54000" marT="24000" marB="24000" anchor="ctr"/>
+                </a:tc>
+              </a:tr>
+              <a:tr h="520000">
+                <a:tc>
+                  <a:txBody>
+                    <a:bodyPr/>
+                    <a:lstStyle/>
+                    <a:p>
+                      <a:pPr/>
+                      <a:r>
+                        <a:rPr lang="en-US" sz="1050" dirty="0">
+                          <a:latin typeface="Calibri"/>
+                        </a:rPr>
+                        <a:t>REST API + dashboard</a:t>
+                      </a:r>
+                    </a:p>
+                  </a:txBody>
+                  <a:tcPr marL="54000" marR="54000" marT="24000" marB="24000" anchor="ctr"/>
+                </a:tc>
+                <a:tc>
+                  <a:txBody>
+                    <a:bodyPr/>
+                    <a:lstStyle/>
+                    <a:p>
+                      <a:pPr/>
+                      <a:r>
+                        <a:rPr lang="en-US" sz="1050" dirty="0">
+                          <a:latin typeface="Calibri"/>
+                        </a:rPr>
+                        <a:t>Yes</a:t>
+                      </a:r>
+                    </a:p>
+                  </a:txBody>
+                  <a:tcPr marL="54000" marR="54000" marT="24000" marB="24000" anchor="ctr"/>
+                </a:tc>
+                <a:tc>
+                  <a:txBody>
+                    <a:bodyPr/>
+                    <a:lstStyle/>
+                    <a:p>
+                      <a:pPr/>
+                      <a:r>
+                        <a:rPr lang="en-US" sz="1050" dirty="0">
+                          <a:latin typeface="Calibri"/>
+                        </a:rPr>
+                        <a:t>No</a:t>
+                      </a:r>
+                    </a:p>
+                  </a:txBody>
+                  <a:tcPr marL="54000" marR="54000" marT="24000" marB="24000" anchor="ctr"/>
+                </a:tc>
+                <a:tc>
+                  <a:txBody>
+                    <a:bodyPr/>
+                    <a:lstStyle/>
+                    <a:p>
+                      <a:pPr/>
+                      <a:r>
+                        <a:rPr lang="en-US" sz="1050" dirty="0">
+                          <a:latin typeface="Calibri"/>
+                        </a:rPr>
+                        <a:t>No</a:t>
+                      </a:r>
+                    </a:p>
+                  </a:txBody>
+                  <a:tcPr marL="54000" marR="54000" marT="24000" marB="24000" anchor="ctr"/>
+                </a:tc>
+                <a:tc>
+                  <a:txBody>
+                    <a:bodyPr/>
+                    <a:lstStyle/>
+                    <a:p>
+                      <a:pPr/>
+                      <a:r>
+                        <a:rPr lang="en-US" sz="1050" dirty="0">
+                          <a:latin typeface="Calibri"/>
+                        </a:rPr>
+                        <a:t>Partial</a:t>
+                      </a:r>
+                    </a:p>
+                  </a:txBody>
+                  <a:tcPr marL="54000" marR="54000" marT="24000" marB="24000" anchor="ctr"/>
+                </a:tc>
+              </a:tr>
+              <a:tr h="520000">
+                <a:tc>
+                  <a:txBody>
+                    <a:bodyPr/>
+                    <a:lstStyle/>
+                    <a:p>
+                      <a:pPr/>
+                      <a:r>
+                        <a:rPr lang="en-US" sz="1050" dirty="0">
+                          <a:latin typeface="Calibri"/>
+                        </a:rPr>
+                        <a:t>Ease of adoption</a:t>
+                      </a:r>
+                    </a:p>
+                  </a:txBody>
+                  <a:tcPr marL="54000" marR="54000" marT="24000" marB="24000" anchor="ctr"/>
+                </a:tc>
+                <a:tc>
+                  <a:txBody>
+                    <a:bodyPr/>
+                    <a:lstStyle/>
+                    <a:p>
+                      <a:pPr/>
+                      <a:r>
+                        <a:rPr lang="en-US" sz="1050" dirty="0">
+                          <a:latin typeface="Calibri"/>
+                        </a:rPr>
+                        <a:t>High</a:t>
+                      </a:r>
+                    </a:p>
+                  </a:txBody>
+                  <a:tcPr marL="54000" marR="54000" marT="24000" marB="24000" anchor="ctr"/>
+                </a:tc>
+                <a:tc>
+                  <a:txBody>
+                    <a:bodyPr/>
+                    <a:lstStyle/>
+                    <a:p>
+                      <a:pPr/>
+                      <a:r>
+                        <a:rPr lang="en-US" sz="1050" dirty="0">
+                          <a:latin typeface="Calibri"/>
+                        </a:rPr>
+                        <a:t>Medium</a:t>
+                      </a:r>
+                    </a:p>
+                  </a:txBody>
+                  <a:tcPr marL="54000" marR="54000" marT="24000" marB="24000" anchor="ctr"/>
+                </a:tc>
+                <a:tc>
+                  <a:txBody>
+                    <a:bodyPr/>
+                    <a:lstStyle/>
+                    <a:p>
+                      <a:pPr/>
+                      <a:r>
+                        <a:rPr lang="en-US" sz="1050" dirty="0">
+                          <a:latin typeface="Calibri"/>
+                        </a:rPr>
+                        <a:t>Low</a:t>
+                      </a:r>
+                    </a:p>
+                  </a:txBody>
+                  <a:tcPr marL="54000" marR="54000" marT="24000" marB="24000" anchor="ctr"/>
+                </a:tc>
+                <a:tc>
+                  <a:txBody>
+                    <a:bodyPr/>
+                    <a:lstStyle/>
+                    <a:p>
+                      <a:pPr/>
+                      <a:r>
+                        <a:rPr lang="en-US" sz="1050" dirty="0">
+                          <a:latin typeface="Calibri"/>
+                        </a:rPr>
+                        <a:t>Medium</a:t>
+                      </a:r>
+                    </a:p>
+                  </a:txBody>
+                  <a:tcPr marL="54000" marR="54000" marT="24000" marB="24000" anchor="ctr"/>
+                </a:tc>
+              </a:tr>
+            </a:tbl>
+          </a:graphicData>
+        </a:graphic>
+      </p:graphicFrame>
+    </p:spTree>
+  </p:cSld>
+  <p:clrMapOvr>
+    <a:masterClrMapping/>
+  </p:clrMapOvr>
+</p:sld>
+</file>
+
+<file path=ppt/slides/slide16.xml><?xml version="1.0" encoding="utf-8"?>
+<p:sld xmlns:a="http://schemas.openxmlformats.org/drawingml/2006/main" xmlns:r="http://schemas.openxmlformats.org/officeDocument/2006/relationships" xmlns:p="http://schemas.openxmlformats.org/presentationml/2006/main">
+  <p:cSld name="Slide 2">
+    <p:bg>
+      <p:bgPr>
+        <a:solidFill>
+          <a:srgbClr val="FFFFFF"/>
+        </a:solidFill>
+        <a:effectLst/>
+      </p:bgPr>
+    </p:bg>
+    <p:spTree>
+      <p:nvGrpSpPr>
+        <p:cNvPr id="1" name=""/>
+        <p:cNvGrpSpPr/>
+        <p:nvPr/>
+      </p:nvGrpSpPr>
+      <p:grpSpPr>
+        <a:xfrm>
+          <a:off x="0" y="0"/>
+          <a:ext cx="0" cy="0"/>
+          <a:chOff x="0" y="0"/>
+          <a:chExt cx="0" cy="0"/>
+        </a:xfrm>
+      </p:grpSpPr>
+      <p:sp>
+        <p:nvSpPr>
+          <p:cNvPr id="3" name="Text 1"/>
+          <p:cNvSpPr/>
+          <p:nvPr/>
+        </p:nvSpPr>
+        <p:spPr>
+          <a:xfrm>
+            <a:off x="720872" y="-122405"/>
+            <a:ext cx="9144000" cy="1188720"/>
+          </a:xfrm>
+          <a:prstGeom prst="rect">
+            <a:avLst/>
+          </a:prstGeom>
+          <a:noFill/>
+          <a:ln/>
+        </p:spPr>
+        <p:txBody>
+          <a:bodyPr wrap="square" rtlCol="0" anchor="ctr"/>
+          <a:lstStyle/>
+          <a:p>
+            <a:pPr marL="0" indent="0">
+              <a:buNone/>
+            </a:pPr>
+            <a:r>
+              <a:rPr lang="en-US" sz="3200" b="1" dirty="0">
+                <a:latin typeface="Cambria" pitchFamily="34" charset="0"/>
+                <a:ea typeface="Cambria" pitchFamily="34" charset="-122"/>
+                <a:cs typeface="Cambria" pitchFamily="34" charset="-120"/>
+              </a:rPr>
+              <a:t>Conclusion</a:t>
+            </a:r>
+            <a:endParaRPr lang="en-US" sz="3200" dirty="0"/>
+          </a:p>
+        </p:txBody>
+      </p:sp>
+      <p:pic>
+        <p:nvPicPr>
+          <p:cNvPr id="21" name="Image 0" descr="klh_logo.png">
+            <a:extLst>
+              <a:ext uri="{FF2B5EF4-FFF2-40B4-BE49-F238E27FC236}">
+                <a16:creationId xmlns:a16="http://schemas.microsoft.com/office/drawing/2014/main" id="{818D94E6-D6DF-ECD3-60A4-3FE0A3FBB180}"/>
+              </a:ext>
+            </a:extLst>
+          </p:cNvPr>
+          <p:cNvPicPr>
+            <a:picLocks noChangeAspect="1"/>
+          </p:cNvPicPr>
+          <p:nvPr/>
+        </p:nvPicPr>
+        <p:blipFill>
+          <a:blip r:embed="rId3"/>
+          <a:stretch>
+            <a:fillRect/>
+          </a:stretch>
+        </p:blipFill>
+        <p:spPr>
+          <a:xfrm>
+            <a:off x="10039265" y="160020"/>
+            <a:ext cx="1902045" cy="623871"/>
+          </a:xfrm>
+          <a:prstGeom prst="rect">
+            <a:avLst/>
+          </a:prstGeom>
+        </p:spPr>
+      </p:pic>
+      <p:sp>
+        <p:nvSpPr>
+          <p:cNvPr id="24" name="Body"/>
+          <p:cNvSpPr txBox="1"/>
+          <p:nvPr/>
+        </p:nvSpPr>
+        <p:spPr>
+          <a:xfrm>
+            <a:off x="720872" y="1000000"/>
+            <a:ext cx="10890460" cy="5150000"/>
+          </a:xfrm>
+          <a:prstGeom prst="rect">
+            <a:avLst/>
+          </a:prstGeom>
+          <a:noFill/>
+        </p:spPr>
+        <p:txBody>
+          <a:bodyPr wrap="square">
+            <a:normAutofit/>
+          </a:bodyPr>
+          <a:lstStyle/>
+          <a:p>
+            <a:pPr marL="342900" indent="-342900">
+              <a:buFont typeface="Arial" pitchFamily="34" charset="0"/>
+              <a:buChar char="•"/>
+            </a:pPr>
+            <a:r>
+              <a:rPr lang="en-US" sz="1700" dirty="0">
+                <a:latin typeface="Calibri"/>
+              </a:rPr>
+              <a:t>Sentinel delivers a working, explainable data reliability platform: data contracts, a six-rule engine, quarantine with reasons, health scoring, a REST API, a dashboard, automated tests, and cloud deployment.</a:t>
+            </a:r>
+          </a:p>
+          <a:p>
+            <a:pPr marL="342900" indent="-342900">
+              <a:buFont typeface="Arial" pitchFamily="34" charset="0"/>
+              <a:buChar char="•"/>
+            </a:pPr>
+            <a:r>
+              <a:rPr lang="en-US" sz="1700" dirty="0">
+                <a:latin typeface="Calibri"/>
+              </a:rPr>
+              <a:t>It addresses real gaps in existing tools — heavyweight infrastructure and weak explainability — with a lightweight, transparent, framework-agnostic design.</a:t>
+            </a:r>
+          </a:p>
+          <a:p>
+            <a:pPr marL="342900" indent="-342900">
+              <a:buFont typeface="Arial" pitchFamily="34" charset="0"/>
+              <a:buChar char="•"/>
+            </a:pPr>
+            <a:r>
+              <a:rPr lang="en-US" sz="1700" dirty="0">
+                <a:latin typeface="Calibri"/>
+              </a:rPr>
+              <a:t>The architecture is built to extend across three semesters — into automated pipelines and AI-telemetry governance — without redesign.</a:t>
+            </a:r>
+          </a:p>
+          <a:p>
+            <a:pPr marL="342900" indent="-342900">
+              <a:buFont typeface="Arial" pitchFamily="34" charset="0"/>
+              <a:buChar char="•"/>
+            </a:pPr>
+            <a:r>
+              <a:rPr lang="en-US" sz="1700" dirty="0">
+                <a:latin typeface="Calibri"/>
+              </a:rPr>
+              <a:t>The project demonstrates full-stack and data-engineering skills end to end: backend, database design, REST APIs, testing, DevOps, and system design.</a:t>
+            </a:r>
+          </a:p>
+        </p:txBody>
+      </p:sp>
+    </p:spTree>
+  </p:cSld>
+  <p:clrMapOvr>
+    <a:masterClrMapping/>
+  </p:clrMapOvr>
+</p:sld>
+</file>
+
+<file path=ppt/slides/slide17.xml><?xml version="1.0" encoding="utf-8"?>
+<p:sld xmlns:a="http://schemas.openxmlformats.org/drawingml/2006/main" xmlns:r="http://schemas.openxmlformats.org/officeDocument/2006/relationships" xmlns:p="http://schemas.openxmlformats.org/presentationml/2006/main">
+  <p:cSld name="Slide 2">
+    <p:bg>
+      <p:bgPr>
+        <a:solidFill>
+          <a:srgbClr val="FFFFFF"/>
+        </a:solidFill>
+        <a:effectLst/>
+      </p:bgPr>
+    </p:bg>
+    <p:spTree>
+      <p:nvGrpSpPr>
+        <p:cNvPr id="1" name=""/>
+        <p:cNvGrpSpPr/>
+        <p:nvPr/>
+      </p:nvGrpSpPr>
+      <p:grpSpPr>
+        <a:xfrm>
+          <a:off x="0" y="0"/>
+          <a:ext cx="0" cy="0"/>
+          <a:chOff x="0" y="0"/>
+          <a:chExt cx="0" cy="0"/>
+        </a:xfrm>
+      </p:grpSpPr>
+      <p:sp>
+        <p:nvSpPr>
+          <p:cNvPr id="3" name="Text 1"/>
+          <p:cNvSpPr/>
+          <p:nvPr/>
+        </p:nvSpPr>
+        <p:spPr>
+          <a:xfrm>
+            <a:off x="720872" y="-122405"/>
+            <a:ext cx="9144000" cy="1188720"/>
+          </a:xfrm>
+          <a:prstGeom prst="rect">
+            <a:avLst/>
+          </a:prstGeom>
+          <a:noFill/>
+          <a:ln/>
+        </p:spPr>
+        <p:txBody>
+          <a:bodyPr wrap="square" rtlCol="0" anchor="ctr"/>
+          <a:lstStyle/>
+          <a:p>
+            <a:pPr marL="0" indent="0">
+              <a:buNone/>
+            </a:pPr>
+            <a:r>
+              <a:rPr lang="en-US" sz="3200" b="1" dirty="0">
+                <a:latin typeface="Cambria" pitchFamily="34" charset="0"/>
+                <a:ea typeface="Cambria" pitchFamily="34" charset="-122"/>
+                <a:cs typeface="Cambria" pitchFamily="34" charset="-120"/>
+              </a:rPr>
+              <a:t>References</a:t>
+            </a:r>
+            <a:endParaRPr lang="en-US" sz="3200" dirty="0"/>
+          </a:p>
+        </p:txBody>
+      </p:sp>
+      <p:pic>
+        <p:nvPicPr>
+          <p:cNvPr id="21" name="Image 0" descr="klh_logo.png">
+            <a:extLst>
+              <a:ext uri="{FF2B5EF4-FFF2-40B4-BE49-F238E27FC236}">
+                <a16:creationId xmlns:a16="http://schemas.microsoft.com/office/drawing/2014/main" id="{818D94E6-D6DF-ECD3-60A4-3FE0A3FBB180}"/>
+              </a:ext>
+            </a:extLst>
+          </p:cNvPr>
+          <p:cNvPicPr>
+            <a:picLocks noChangeAspect="1"/>
+          </p:cNvPicPr>
+          <p:nvPr/>
+        </p:nvPicPr>
+        <p:blipFill>
+          <a:blip r:embed="rId3"/>
+          <a:stretch>
+            <a:fillRect/>
+          </a:stretch>
+        </p:blipFill>
+        <p:spPr>
+          <a:xfrm>
+            <a:off x="10039265" y="160020"/>
+            <a:ext cx="1902045" cy="623871"/>
+          </a:xfrm>
+          <a:prstGeom prst="rect">
+            <a:avLst/>
+          </a:prstGeom>
+        </p:spPr>
+      </p:pic>
+      <p:sp>
+        <p:nvSpPr>
+          <p:cNvPr id="24" name="Body"/>
+          <p:cNvSpPr txBox="1"/>
+          <p:nvPr/>
+        </p:nvSpPr>
+        <p:spPr>
+          <a:xfrm>
+            <a:off x="720872" y="950000"/>
+            <a:ext cx="10890460" cy="5300000"/>
+          </a:xfrm>
+          <a:prstGeom prst="rect">
+            <a:avLst/>
+          </a:prstGeom>
+          <a:noFill/>
+        </p:spPr>
+        <p:txBody>
+          <a:bodyPr wrap="square">
+            <a:normAutofit/>
+          </a:bodyPr>
+          <a:lstStyle/>
+          <a:p>
+            <a:pPr marL="0" indent="0">
+              <a:buNone/>
+            </a:pPr>
+            <a:r>
+              <a:rPr lang="en-US" sz="1250" dirty="0">
+                <a:latin typeface="Calibri"/>
+              </a:rPr>
+              <a:t>[1] R. Y. Wang and D. M. Strong, "Beyond Accuracy: What Data Quality Means to Data Consumers," Journal of Management Information Systems, 1996.</a:t>
+            </a:r>
+          </a:p>
+          <a:p>
+            <a:pPr marL="0" indent="0">
+              <a:buNone/>
+            </a:pPr>
+            <a:r>
+              <a:rPr lang="en-US" sz="1250" dirty="0">
+                <a:latin typeface="Calibri"/>
+              </a:rPr>
+              <a:t>[2] E. Rahm and H. H. Do, "Data Cleaning: Problems and Current Approaches," IEEE Data Engineering Bulletin, 2000.</a:t>
+            </a:r>
+          </a:p>
+          <a:p>
+            <a:pPr marL="0" indent="0">
+              <a:buNone/>
+            </a:pPr>
+            <a:r>
+              <a:rPr lang="en-US" sz="1250" dirty="0">
+                <a:latin typeface="Calibri"/>
+              </a:rPr>
+              <a:t>[3] C. Batini, C. Cappiello, C. Francalanci, and A. Maurino, "Methodologies for Data Quality Assessment and Improvement," ACM Computing Surveys, 2009.</a:t>
+            </a:r>
+          </a:p>
+          <a:p>
+            <a:pPr marL="0" indent="0">
+              <a:buNone/>
+            </a:pPr>
+            <a:r>
+              <a:rPr lang="en-US" sz="1250" dirty="0">
+                <a:latin typeface="Calibri"/>
+              </a:rPr>
+              <a:t>[4] Z. Abedjan et al., "Detecting Data Errors: Where Are We and What Needs to Be Done?," Proc. VLDB Endowment, 2016.</a:t>
+            </a:r>
+          </a:p>
+          <a:p>
+            <a:pPr marL="0" indent="0">
+              <a:buNone/>
+            </a:pPr>
+            <a:r>
+              <a:rPr lang="en-US" sz="1250" dirty="0">
+                <a:latin typeface="Calibri"/>
+              </a:rPr>
+              <a:t>[5] S. Schelter et al., "Automating Large-Scale Data Quality Verification," Proc. VLDB Endowment, 2018.</a:t>
+            </a:r>
+          </a:p>
+          <a:p>
+            <a:pPr marL="0" indent="0">
+              <a:buNone/>
+            </a:pPr>
+            <a:r>
+              <a:rPr lang="en-US" sz="1250" dirty="0">
+                <a:latin typeface="Calibri"/>
+              </a:rPr>
+              <a:t>[6] E. Breck, N. Polyzotis, S. Roy, S. Whang, and M. Zinkevich, "Data Validation for Machine Learning," Proc. MLSys, 2019.</a:t>
+            </a:r>
+          </a:p>
+          <a:p>
+            <a:pPr marL="0" indent="0">
+              <a:buNone/>
+            </a:pPr>
+            <a:r>
+              <a:rPr lang="en-US" sz="1250" dirty="0">
+                <a:latin typeface="Calibri"/>
+              </a:rPr>
+              <a:t>[7] N. Hynes, D. Sculley, and M. Terry, "The Data Linter: Lightweight Automated Sanity Checking for ML Data Sets," NIPS ML Systems Workshop, 2017.</a:t>
+            </a:r>
+          </a:p>
+          <a:p>
+            <a:pPr marL="0" indent="0">
+              <a:buNone/>
+            </a:pPr>
+            <a:r>
+              <a:rPr lang="en-US" sz="1250" dirty="0">
+                <a:latin typeface="Calibri"/>
+              </a:rPr>
+              <a:t>[8] S. Redyuk, Z. Kaoudi, V. Markl, and S. Schelter, "Automating Data Quality Validation for Dynamic Data Ingestion," Proc. EDBT, 2021.</a:t>
+            </a:r>
+          </a:p>
+          <a:p>
+            <a:pPr marL="0" indent="0">
+              <a:buNone/>
+            </a:pPr>
+            <a:r>
+              <a:rPr lang="en-US" sz="1250" dirty="0">
+                <a:latin typeface="Calibri"/>
+              </a:rPr>
+              <a:t>[9] D. Sculley et al., "Hidden Technical Debt in Machine Learning Systems," Proc. NeurIPS, 2015.</a:t>
+            </a:r>
+          </a:p>
+          <a:p>
+            <a:pPr marL="0" indent="0">
+              <a:buNone/>
+            </a:pPr>
+            <a:r>
+              <a:rPr lang="en-US" sz="1250" dirty="0">
+                <a:latin typeface="Calibri"/>
+              </a:rPr>
+              <a:t>[10] N. Polyzotis, S. Roy, S. Whang, and M. Zinkevich, "Data Lifecycle Challenges in Production Machine Learning: A Survey," SIGMOD Record, 2018.</a:t>
+            </a:r>
+          </a:p>
+        </p:txBody>
+      </p:sp>
+    </p:spTree>
+  </p:cSld>
+  <p:clrMapOvr>
+    <a:masterClrMapping/>
+  </p:clrMapOvr>
+</p:sld>
+</file>
+
 <file path=ppt/slides/slide2.xml><?xml version="1.0" encoding="utf-8"?>
 <p:sld xmlns:a="http://schemas.openxmlformats.org/drawingml/2006/main" xmlns:r="http://schemas.openxmlformats.org/officeDocument/2006/relationships" xmlns:p="http://schemas.openxmlformats.org/presentationml/2006/main">
   <p:cSld name="Slide 2">
@@ -1785,6 +3803,1937 @@
         <p14:creationId xmlns:p14="http://schemas.microsoft.com/office/powerpoint/2010/main" val="1527932751"/>
       </p:ext>
     </p:extLst>
+  </p:cSld>
+  <p:clrMapOvr>
+    <a:masterClrMapping/>
+  </p:clrMapOvr>
+</p:sld>
+</file>
+
+<file path=ppt/slides/slide4.xml><?xml version="1.0" encoding="utf-8"?>
+<p:sld xmlns:a="http://schemas.openxmlformats.org/drawingml/2006/main" xmlns:r="http://schemas.openxmlformats.org/officeDocument/2006/relationships" xmlns:p="http://schemas.openxmlformats.org/presentationml/2006/main">
+  <p:cSld name="Slide 2">
+    <p:bg>
+      <p:bgPr>
+        <a:solidFill>
+          <a:srgbClr val="FFFFFF"/>
+        </a:solidFill>
+        <a:effectLst/>
+      </p:bgPr>
+    </p:bg>
+    <p:spTree>
+      <p:nvGrpSpPr>
+        <p:cNvPr id="1" name=""/>
+        <p:cNvGrpSpPr/>
+        <p:nvPr/>
+      </p:nvGrpSpPr>
+      <p:grpSpPr>
+        <a:xfrm>
+          <a:off x="0" y="0"/>
+          <a:ext cx="0" cy="0"/>
+          <a:chOff x="0" y="0"/>
+          <a:chExt cx="0" cy="0"/>
+        </a:xfrm>
+      </p:grpSpPr>
+      <p:sp>
+        <p:nvSpPr>
+          <p:cNvPr id="3" name="Text 1"/>
+          <p:cNvSpPr/>
+          <p:nvPr/>
+        </p:nvSpPr>
+        <p:spPr>
+          <a:xfrm>
+            <a:off x="720872" y="-122405"/>
+            <a:ext cx="9144000" cy="1188720"/>
+          </a:xfrm>
+          <a:prstGeom prst="rect">
+            <a:avLst/>
+          </a:prstGeom>
+          <a:noFill/>
+          <a:ln/>
+        </p:spPr>
+        <p:txBody>
+          <a:bodyPr wrap="square" rtlCol="0" anchor="ctr"/>
+          <a:lstStyle/>
+          <a:p>
+            <a:pPr marL="0" indent="0">
+              <a:buNone/>
+            </a:pPr>
+            <a:r>
+              <a:rPr lang="en-US" sz="3200" b="1" dirty="0">
+                <a:latin typeface="Cambria" pitchFamily="34" charset="0"/>
+                <a:ea typeface="Cambria" pitchFamily="34" charset="-122"/>
+                <a:cs typeface="Cambria" pitchFamily="34" charset="-120"/>
+              </a:rPr>
+              <a:t>Literature Survey (2/2)</a:t>
+            </a:r>
+            <a:endParaRPr lang="en-US" sz="3200" dirty="0"/>
+          </a:p>
+        </p:txBody>
+      </p:sp>
+      <p:pic>
+        <p:nvPicPr>
+          <p:cNvPr id="21" name="Image 0" descr="klh_logo.png">
+            <a:extLst>
+              <a:ext uri="{FF2B5EF4-FFF2-40B4-BE49-F238E27FC236}">
+                <a16:creationId xmlns:a16="http://schemas.microsoft.com/office/drawing/2014/main" id="{818D94E6-D6DF-ECD3-60A4-3FE0A3FBB180}"/>
+              </a:ext>
+            </a:extLst>
+          </p:cNvPr>
+          <p:cNvPicPr>
+            <a:picLocks noChangeAspect="1"/>
+          </p:cNvPicPr>
+          <p:nvPr/>
+        </p:nvPicPr>
+        <p:blipFill>
+          <a:blip r:embed="rId2"/>
+          <a:stretch>
+            <a:fillRect/>
+          </a:stretch>
+        </p:blipFill>
+        <p:spPr>
+          <a:xfrm>
+            <a:off x="10039265" y="160020"/>
+            <a:ext cx="1902045" cy="623871"/>
+          </a:xfrm>
+          <a:prstGeom prst="rect">
+            <a:avLst/>
+          </a:prstGeom>
+        </p:spPr>
+      </p:pic>
+      <p:graphicFrame>
+        <p:nvGraphicFramePr>
+          <p:cNvPr id="40" name="LitTable"/>
+          <p:cNvGraphicFramePr/>
+          <p:nvPr/>
+        </p:nvGraphicFramePr>
+        <p:xfrm>
+          <a:off x="720872" y="1000000"/>
+          <a:ext cx="10890460" cy="5080000"/>
+        </p:xfrm>
+        <a:graphic>
+          <a:graphicData uri="http://schemas.openxmlformats.org/drawingml/2006/table">
+            <a:tbl>
+              <a:tblPr firstRow="1">
+                <a:tableStyleId>{5940675A-B579-460E-94D1-54222C63F5DA}</a:tableStyleId>
+              </a:tblPr>
+              <a:tblGrid>
+                <a:gridCol w="500000">
+                  <a:extLst>
+                    <a:ext uri="{9D8B030D-6E8A-4147-A177-3AD203B41FA5}">
+                      <a16:colId xmlns:a16="http://schemas.microsoft.com/office/drawing/2014/main" val="20000"/>
+                    </a:ext>
+                  </a:extLst>
+                </a:gridCol>
+                <a:gridCol w="2350000">
+                  <a:extLst>
+                    <a:ext uri="{9D8B030D-6E8A-4147-A177-3AD203B41FA5}">
+                      <a16:colId xmlns:a16="http://schemas.microsoft.com/office/drawing/2014/main" val="20001"/>
+                    </a:ext>
+                  </a:extLst>
+                </a:gridCol>
+                <a:gridCol w="4250000">
+                  <a:extLst>
+                    <a:ext uri="{9D8B030D-6E8A-4147-A177-3AD203B41FA5}">
+                      <a16:colId xmlns:a16="http://schemas.microsoft.com/office/drawing/2014/main" val="20002"/>
+                    </a:ext>
+                  </a:extLst>
+                </a:gridCol>
+                <a:gridCol w="3790460">
+                  <a:extLst>
+                    <a:ext uri="{9D8B030D-6E8A-4147-A177-3AD203B41FA5}">
+                      <a16:colId xmlns:a16="http://schemas.microsoft.com/office/drawing/2014/main" val="20003"/>
+                    </a:ext>
+                  </a:extLst>
+                </a:gridCol>
+              </a:tblGrid>
+              <a:tr h="380000">
+                <a:tc>
+                  <a:txBody>
+                    <a:bodyPr/>
+                    <a:lstStyle/>
+                    <a:p>
+                      <a:pPr algn="ctr"/>
+                      <a:r>
+                        <a:rPr lang="en-US" sz="1200" b="1" dirty="0">
+                          <a:solidFill>
+                            <a:srgbClr val="FFFFFF"/>
+                          </a:solidFill>
+                          <a:latin typeface="Cambria"/>
+                        </a:rPr>
+                        <a:t>#</a:t>
+                      </a:r>
+                    </a:p>
+                  </a:txBody>
+                  <a:tcPr marL="54000" marR="54000" marT="27000" marB="27000" anchor="ctr">
+                    <a:solidFill>
+                      <a:srgbClr val="8C1D40"/>
+                    </a:solidFill>
+                  </a:tcPr>
+                </a:tc>
+                <a:tc>
+                  <a:txBody>
+                    <a:bodyPr/>
+                    <a:lstStyle/>
+                    <a:p>
+                      <a:pPr algn="ctr"/>
+                      <a:r>
+                        <a:rPr lang="en-US" sz="1200" b="1" dirty="0">
+                          <a:solidFill>
+                            <a:srgbClr val="FFFFFF"/>
+                          </a:solidFill>
+                          <a:latin typeface="Cambria"/>
+                        </a:rPr>
+                        <a:t>Authors (Year)</a:t>
+                      </a:r>
+                    </a:p>
+                  </a:txBody>
+                  <a:tcPr marL="54000" marR="54000" marT="27000" marB="27000" anchor="ctr">
+                    <a:solidFill>
+                      <a:srgbClr val="8C1D40"/>
+                    </a:solidFill>
+                  </a:tcPr>
+                </a:tc>
+                <a:tc>
+                  <a:txBody>
+                    <a:bodyPr/>
+                    <a:lstStyle/>
+                    <a:p>
+                      <a:pPr algn="ctr"/>
+                      <a:r>
+                        <a:rPr lang="en-US" sz="1200" b="1" dirty="0">
+                          <a:solidFill>
+                            <a:srgbClr val="FFFFFF"/>
+                          </a:solidFill>
+                          <a:latin typeface="Cambria"/>
+                        </a:rPr>
+                        <a:t>Focus / Contribution</a:t>
+                      </a:r>
+                    </a:p>
+                  </a:txBody>
+                  <a:tcPr marL="54000" marR="54000" marT="27000" marB="27000" anchor="ctr">
+                    <a:solidFill>
+                      <a:srgbClr val="8C1D40"/>
+                    </a:solidFill>
+                  </a:tcPr>
+                </a:tc>
+                <a:tc>
+                  <a:txBody>
+                    <a:bodyPr/>
+                    <a:lstStyle/>
+                    <a:p>
+                      <a:pPr algn="ctr"/>
+                      <a:r>
+                        <a:rPr lang="en-US" sz="1200" b="1" dirty="0">
+                          <a:solidFill>
+                            <a:srgbClr val="FFFFFF"/>
+                          </a:solidFill>
+                          <a:latin typeface="Cambria"/>
+                        </a:rPr>
+                        <a:t>Relevance to Sentinel</a:t>
+                      </a:r>
+                    </a:p>
+                  </a:txBody>
+                  <a:tcPr marL="54000" marR="54000" marT="27000" marB="27000" anchor="ctr">
+                    <a:solidFill>
+                      <a:srgbClr val="8C1D40"/>
+                    </a:solidFill>
+                  </a:tcPr>
+                </a:tc>
+                <a:extLst>
+                  <a:ext uri="{0D108BD9-81ED-4DB2-BD59-A6C34878D82A}">
+                    <a16:rowId xmlns:a16="http://schemas.microsoft.com/office/drawing/2014/main" val="10000"/>
+                  </a:ext>
+                </a:extLst>
+              </a:tr>
+              <a:tr h="940000">
+                <a:tc>
+                  <a:txBody>
+                    <a:bodyPr/>
+                    <a:lstStyle/>
+                    <a:p>
+                      <a:pPr algn="ctr"/>
+                      <a:r>
+                        <a:rPr lang="en-US" sz="1100" dirty="0">
+                          <a:latin typeface="Calibri"/>
+                        </a:rPr>
+                        <a:t>6</a:t>
+                      </a:r>
+                    </a:p>
+                  </a:txBody>
+                  <a:tcPr marL="54000" marR="54000" marT="27000" marB="27000" anchor="ctr"/>
+                </a:tc>
+                <a:tc>
+                  <a:txBody>
+                    <a:bodyPr/>
+                    <a:lstStyle/>
+                    <a:p>
+                      <a:r>
+                        <a:rPr lang="en-US" sz="1100" dirty="0">
+                          <a:latin typeface="Calibri"/>
+                        </a:rPr>
+                        <a:t>Breck et al. (2019)</a:t>
+                      </a:r>
+                    </a:p>
+                  </a:txBody>
+                  <a:tcPr marL="54000" marR="54000" marT="27000" marB="27000" anchor="ctr"/>
+                </a:tc>
+                <a:tc>
+                  <a:txBody>
+                    <a:bodyPr/>
+                    <a:lstStyle/>
+                    <a:p>
+                      <a:r>
+                        <a:rPr lang="en-US" sz="1100" dirty="0">
+                          <a:latin typeface="Calibri"/>
+                        </a:rPr>
+                        <a:t>Google TFDV — validates data against a schema in ML pipelines and flags anomalies and skew.</a:t>
+                      </a:r>
+                    </a:p>
+                  </a:txBody>
+                  <a:tcPr marL="54000" marR="54000" marT="27000" marB="27000" anchor="ctr"/>
+                </a:tc>
+                <a:tc>
+                  <a:txBody>
+                    <a:bodyPr/>
+                    <a:lstStyle/>
+                    <a:p>
+                      <a:r>
+                        <a:rPr lang="en-US" sz="1100" dirty="0">
+                          <a:latin typeface="Calibri"/>
+                        </a:rPr>
+                        <a:t>Inspiration for data contracts and quarantining bad rows.</a:t>
+                      </a:r>
+                    </a:p>
+                  </a:txBody>
+                  <a:tcPr marL="54000" marR="54000" marT="27000" marB="27000" anchor="ctr"/>
+                </a:tc>
+                <a:extLst>
+                  <a:ext uri="{0D108BD9-81ED-4DB2-BD59-A6C34878D82A}">
+                    <a16:rowId xmlns:a16="http://schemas.microsoft.com/office/drawing/2014/main" val="10001"/>
+                  </a:ext>
+                </a:extLst>
+              </a:tr>
+              <a:tr h="940000">
+                <a:tc>
+                  <a:txBody>
+                    <a:bodyPr/>
+                    <a:lstStyle/>
+                    <a:p>
+                      <a:pPr algn="ctr"/>
+                      <a:r>
+                        <a:rPr lang="en-US" sz="1100" dirty="0">
+                          <a:latin typeface="Calibri"/>
+                        </a:rPr>
+                        <a:t>7</a:t>
+                      </a:r>
+                    </a:p>
+                  </a:txBody>
+                  <a:tcPr marL="54000" marR="54000" marT="27000" marB="27000" anchor="ctr"/>
+                </a:tc>
+                <a:tc>
+                  <a:txBody>
+                    <a:bodyPr/>
+                    <a:lstStyle/>
+                    <a:p>
+                      <a:r>
+                        <a:rPr lang="en-US" sz="1100" dirty="0">
+                          <a:latin typeface="Calibri"/>
+                        </a:rPr>
+                        <a:t>Hynes et al. (2017)</a:t>
+                      </a:r>
+                    </a:p>
+                  </a:txBody>
+                  <a:tcPr marL="54000" marR="54000" marT="27000" marB="27000" anchor="ctr"/>
+                </a:tc>
+                <a:tc>
+                  <a:txBody>
+                    <a:bodyPr/>
+                    <a:lstStyle/>
+                    <a:p>
+                      <a:r>
+                        <a:rPr lang="en-US" sz="1100" dirty="0">
+                          <a:latin typeface="Calibri"/>
+                        </a:rPr>
+                        <a:t>Data Linter — lightweight automated sanity checks that flag suspicious data before ML use.</a:t>
+                      </a:r>
+                    </a:p>
+                  </a:txBody>
+                  <a:tcPr marL="54000" marR="54000" marT="27000" marB="27000" anchor="ctr"/>
+                </a:tc>
+                <a:tc>
+                  <a:txBody>
+                    <a:bodyPr/>
+                    <a:lstStyle/>
+                    <a:p>
+                      <a:r>
+                        <a:rPr lang="en-US" sz="1100" dirty="0">
+                          <a:latin typeface="Calibri"/>
+                        </a:rPr>
+                        <a:t>Supports fast, automated rule checks before consumption.</a:t>
+                      </a:r>
+                    </a:p>
+                  </a:txBody>
+                  <a:tcPr marL="54000" marR="54000" marT="27000" marB="27000" anchor="ctr"/>
+                </a:tc>
+                <a:extLst>
+                  <a:ext uri="{0D108BD9-81ED-4DB2-BD59-A6C34878D82A}">
+                    <a16:rowId xmlns:a16="http://schemas.microsoft.com/office/drawing/2014/main" val="10002"/>
+                  </a:ext>
+                </a:extLst>
+              </a:tr>
+              <a:tr h="940000">
+                <a:tc>
+                  <a:txBody>
+                    <a:bodyPr/>
+                    <a:lstStyle/>
+                    <a:p>
+                      <a:pPr algn="ctr"/>
+                      <a:r>
+                        <a:rPr lang="en-US" sz="1100" dirty="0">
+                          <a:latin typeface="Calibri"/>
+                        </a:rPr>
+                        <a:t>8</a:t>
+                      </a:r>
+                    </a:p>
+                  </a:txBody>
+                  <a:tcPr marL="54000" marR="54000" marT="27000" marB="27000" anchor="ctr"/>
+                </a:tc>
+                <a:tc>
+                  <a:txBody>
+                    <a:bodyPr/>
+                    <a:lstStyle/>
+                    <a:p>
+                      <a:r>
+                        <a:rPr lang="en-US" sz="1100" dirty="0">
+                          <a:latin typeface="Calibri"/>
+                        </a:rPr>
+                        <a:t>Redyuk et al. (2021)</a:t>
+                      </a:r>
+                    </a:p>
+                  </a:txBody>
+                  <a:tcPr marL="54000" marR="54000" marT="27000" marB="27000" anchor="ctr"/>
+                </a:tc>
+                <a:tc>
+                  <a:txBody>
+                    <a:bodyPr/>
+                    <a:lstStyle/>
+                    <a:p>
+                      <a:r>
+                        <a:rPr lang="en-US" sz="1100" dirty="0">
+                          <a:latin typeface="Calibri"/>
+                        </a:rPr>
+                        <a:t>Automated data-quality validation for continuously ingested data with adaptive thresholds.</a:t>
+                      </a:r>
+                    </a:p>
+                  </a:txBody>
+                  <a:tcPr marL="54000" marR="54000" marT="27000" marB="27000" anchor="ctr"/>
+                </a:tc>
+                <a:tc>
+                  <a:txBody>
+                    <a:bodyPr/>
+                    <a:lstStyle/>
+                    <a:p>
+                      <a:r>
+                        <a:rPr lang="en-US" sz="1100" dirty="0">
+                          <a:latin typeface="Calibri"/>
+                        </a:rPr>
+                        <a:t>Extends Sentinel toward pipeline / batch ingestion.</a:t>
+                      </a:r>
+                    </a:p>
+                  </a:txBody>
+                  <a:tcPr marL="54000" marR="54000" marT="27000" marB="27000" anchor="ctr"/>
+                </a:tc>
+                <a:extLst>
+                  <a:ext uri="{0D108BD9-81ED-4DB2-BD59-A6C34878D82A}">
+                    <a16:rowId xmlns:a16="http://schemas.microsoft.com/office/drawing/2014/main" val="10003"/>
+                  </a:ext>
+                </a:extLst>
+              </a:tr>
+              <a:tr h="940000">
+                <a:tc>
+                  <a:txBody>
+                    <a:bodyPr/>
+                    <a:lstStyle/>
+                    <a:p>
+                      <a:pPr algn="ctr"/>
+                      <a:r>
+                        <a:rPr lang="en-US" sz="1100" dirty="0">
+                          <a:latin typeface="Calibri"/>
+                        </a:rPr>
+                        <a:t>9</a:t>
+                      </a:r>
+                    </a:p>
+                  </a:txBody>
+                  <a:tcPr marL="54000" marR="54000" marT="27000" marB="27000" anchor="ctr"/>
+                </a:tc>
+                <a:tc>
+                  <a:txBody>
+                    <a:bodyPr/>
+                    <a:lstStyle/>
+                    <a:p>
+                      <a:r>
+                        <a:rPr lang="en-US" sz="1100" dirty="0">
+                          <a:latin typeface="Calibri"/>
+                        </a:rPr>
+                        <a:t>Sculley et al. (2015)</a:t>
+                      </a:r>
+                    </a:p>
+                  </a:txBody>
+                  <a:tcPr marL="54000" marR="54000" marT="27000" marB="27000" anchor="ctr"/>
+                </a:tc>
+                <a:tc>
+                  <a:txBody>
+                    <a:bodyPr/>
+                    <a:lstStyle/>
+                    <a:p>
+                      <a:r>
+                        <a:rPr lang="en-US" sz="1100" dirty="0">
+                          <a:latin typeface="Calibri"/>
+                        </a:rPr>
+                        <a:t>Showed unchecked data dependencies create hidden technical debt in ML systems.</a:t>
+                      </a:r>
+                    </a:p>
+                  </a:txBody>
+                  <a:tcPr marL="54000" marR="54000" marT="27000" marB="27000" anchor="ctr"/>
+                </a:tc>
+                <a:tc>
+                  <a:txBody>
+                    <a:bodyPr/>
+                    <a:lstStyle/>
+                    <a:p>
+                      <a:r>
+                        <a:rPr lang="en-US" sz="1100" dirty="0">
+                          <a:latin typeface="Calibri"/>
+                        </a:rPr>
+                        <a:t>Justifies validating data before it is consumed.</a:t>
+                      </a:r>
+                    </a:p>
+                  </a:txBody>
+                  <a:tcPr marL="54000" marR="54000" marT="27000" marB="27000" anchor="ctr"/>
+                </a:tc>
+                <a:extLst>
+                  <a:ext uri="{0D108BD9-81ED-4DB2-BD59-A6C34878D82A}">
+                    <a16:rowId xmlns:a16="http://schemas.microsoft.com/office/drawing/2014/main" val="10004"/>
+                  </a:ext>
+                </a:extLst>
+              </a:tr>
+              <a:tr h="940000">
+                <a:tc>
+                  <a:txBody>
+                    <a:bodyPr/>
+                    <a:lstStyle/>
+                    <a:p>
+                      <a:pPr algn="ctr"/>
+                      <a:r>
+                        <a:rPr lang="en-US" sz="1100" dirty="0">
+                          <a:latin typeface="Calibri"/>
+                        </a:rPr>
+                        <a:t>10</a:t>
+                      </a:r>
+                    </a:p>
+                  </a:txBody>
+                  <a:tcPr marL="54000" marR="54000" marT="27000" marB="27000" anchor="ctr"/>
+                </a:tc>
+                <a:tc>
+                  <a:txBody>
+                    <a:bodyPr/>
+                    <a:lstStyle/>
+                    <a:p>
+                      <a:r>
+                        <a:rPr lang="en-US" sz="1100" dirty="0">
+                          <a:latin typeface="Calibri"/>
+                        </a:rPr>
+                        <a:t>Polyzotis et al. (2018)</a:t>
+                      </a:r>
+                    </a:p>
+                  </a:txBody>
+                  <a:tcPr marL="54000" marR="54000" marT="27000" marB="27000" anchor="ctr"/>
+                </a:tc>
+                <a:tc>
+                  <a:txBody>
+                    <a:bodyPr/>
+                    <a:lstStyle/>
+                    <a:p>
+                      <a:r>
+                        <a:rPr lang="en-US" sz="1100" dirty="0">
+                          <a:latin typeface="Calibri"/>
+                        </a:rPr>
+                        <a:t>Surveyed data-management challenges — validation, understanding, cleaning — in production ML.</a:t>
+                      </a:r>
+                    </a:p>
+                  </a:txBody>
+                  <a:tcPr marL="54000" marR="54000" marT="27000" marB="27000" anchor="ctr"/>
+                </a:tc>
+                <a:tc>
+                  <a:txBody>
+                    <a:bodyPr/>
+                    <a:lstStyle/>
+                    <a:p>
+                      <a:r>
+                        <a:rPr lang="en-US" sz="1100" dirty="0">
+                          <a:latin typeface="Calibri"/>
+                        </a:rPr>
+                        <a:t>Positions Sentinel across the data lifecycle.</a:t>
+                      </a:r>
+                    </a:p>
+                  </a:txBody>
+                  <a:tcPr marL="54000" marR="54000" marT="27000" marB="27000" anchor="ctr"/>
+                </a:tc>
+                <a:extLst>
+                  <a:ext uri="{0D108BD9-81ED-4DB2-BD59-A6C34878D82A}">
+                    <a16:rowId xmlns:a16="http://schemas.microsoft.com/office/drawing/2014/main" val="10005"/>
+                  </a:ext>
+                </a:extLst>
+              </a:tr>
+            </a:tbl>
+          </a:graphicData>
+        </a:graphic>
+      </p:graphicFrame>
+    </p:spTree>
+  </p:cSld>
+  <p:clrMapOvr>
+    <a:masterClrMapping/>
+  </p:clrMapOvr>
+</p:sld>
+</file>
+
+<file path=ppt/slides/slide5.xml><?xml version="1.0" encoding="utf-8"?>
+<p:sld xmlns:a="http://schemas.openxmlformats.org/drawingml/2006/main" xmlns:r="http://schemas.openxmlformats.org/officeDocument/2006/relationships" xmlns:p="http://schemas.openxmlformats.org/presentationml/2006/main">
+  <p:cSld name="Slide 2">
+    <p:bg>
+      <p:bgPr>
+        <a:solidFill>
+          <a:srgbClr val="FFFFFF"/>
+        </a:solidFill>
+        <a:effectLst/>
+      </p:bgPr>
+    </p:bg>
+    <p:spTree>
+      <p:nvGrpSpPr>
+        <p:cNvPr id="1" name=""/>
+        <p:cNvGrpSpPr/>
+        <p:nvPr/>
+      </p:nvGrpSpPr>
+      <p:grpSpPr>
+        <a:xfrm>
+          <a:off x="0" y="0"/>
+          <a:ext cx="0" cy="0"/>
+          <a:chOff x="0" y="0"/>
+          <a:chExt cx="0" cy="0"/>
+        </a:xfrm>
+      </p:grpSpPr>
+      <p:sp>
+        <p:nvSpPr>
+          <p:cNvPr id="3" name="Text 1"/>
+          <p:cNvSpPr/>
+          <p:nvPr/>
+        </p:nvSpPr>
+        <p:spPr>
+          <a:xfrm>
+            <a:off x="720872" y="-122405"/>
+            <a:ext cx="9144000" cy="1188720"/>
+          </a:xfrm>
+          <a:prstGeom prst="rect">
+            <a:avLst/>
+          </a:prstGeom>
+          <a:noFill/>
+          <a:ln/>
+        </p:spPr>
+        <p:txBody>
+          <a:bodyPr wrap="square" rtlCol="0" anchor="ctr"/>
+          <a:lstStyle/>
+          <a:p>
+            <a:pPr marL="0" indent="0">
+              <a:buNone/>
+            </a:pPr>
+            <a:r>
+              <a:rPr lang="en-US" sz="3200" b="1" dirty="0">
+                <a:latin typeface="Cambria" pitchFamily="34" charset="0"/>
+                <a:ea typeface="Cambria" pitchFamily="34" charset="-122"/>
+                <a:cs typeface="Cambria" pitchFamily="34" charset="-120"/>
+              </a:rPr>
+              <a:t>Objectives</a:t>
+            </a:r>
+            <a:endParaRPr lang="en-US" sz="3200" dirty="0"/>
+          </a:p>
+        </p:txBody>
+      </p:sp>
+      <p:pic>
+        <p:nvPicPr>
+          <p:cNvPr id="21" name="Image 0" descr="klh_logo.png">
+            <a:extLst>
+              <a:ext uri="{FF2B5EF4-FFF2-40B4-BE49-F238E27FC236}">
+                <a16:creationId xmlns:a16="http://schemas.microsoft.com/office/drawing/2014/main" id="{818D94E6-D6DF-ECD3-60A4-3FE0A3FBB180}"/>
+              </a:ext>
+            </a:extLst>
+          </p:cNvPr>
+          <p:cNvPicPr>
+            <a:picLocks noChangeAspect="1"/>
+          </p:cNvPicPr>
+          <p:nvPr/>
+        </p:nvPicPr>
+        <p:blipFill>
+          <a:blip r:embed="rId2"/>
+          <a:stretch>
+            <a:fillRect/>
+          </a:stretch>
+        </p:blipFill>
+        <p:spPr>
+          <a:xfrm>
+            <a:off x="10039265" y="160020"/>
+            <a:ext cx="1902045" cy="623871"/>
+          </a:xfrm>
+          <a:prstGeom prst="rect">
+            <a:avLst/>
+          </a:prstGeom>
+        </p:spPr>
+      </p:pic>
+      <p:sp>
+        <p:nvSpPr>
+          <p:cNvPr id="24" name="Body"/>
+          <p:cNvSpPr txBox="1"/>
+          <p:nvPr/>
+        </p:nvSpPr>
+        <p:spPr>
+          <a:xfrm>
+            <a:off x="720872" y="1000000"/>
+            <a:ext cx="10890460" cy="5100000"/>
+          </a:xfrm>
+          <a:prstGeom prst="rect">
+            <a:avLst/>
+          </a:prstGeom>
+          <a:noFill/>
+        </p:spPr>
+        <p:txBody>
+          <a:bodyPr wrap="square">
+            <a:normAutofit/>
+          </a:bodyPr>
+          <a:lstStyle/>
+          <a:p>
+            <a:pPr marL="0" indent="0">
+              <a:buNone/>
+            </a:pPr>
+            <a:r>
+              <a:rPr lang="en-US" sz="2000" b="1" dirty="0">
+                <a:latin typeface="Calibri"/>
+              </a:rPr>
+              <a:t>Objective: build a data reliability platform that validates datasets against declarative data contracts before they are used in dashboards, applications, analytics, or AI systems.</a:t>
+            </a:r>
+          </a:p>
+          <a:p>
+            <a:pPr marL="0" indent="0">
+              <a:buNone/>
+            </a:pPr>
+            <a:endParaRPr lang="en-US" sz="800"/>
+          </a:p>
+          <a:p>
+            <a:pPr marL="342900" indent="-342900">
+              <a:buFont typeface="Arial" pitchFamily="34" charset="0"/>
+              <a:buChar char="•"/>
+            </a:pPr>
+            <a:r>
+              <a:rPr lang="en-US" sz="1800" dirty="0">
+                <a:latin typeface="Calibri"/>
+              </a:rPr>
+              <a:t>Design a declarative data-contract model of column-level rules that defines what “good” data looks like.</a:t>
+            </a:r>
+          </a:p>
+          <a:p>
+            <a:pPr marL="342900" indent="-342900">
+              <a:buFont typeface="Arial" pitchFamily="34" charset="0"/>
+              <a:buChar char="•"/>
+            </a:pPr>
+            <a:r>
+              <a:rPr lang="en-US" sz="1800" dirty="0">
+                <a:latin typeface="Calibri"/>
+              </a:rPr>
+              <a:t>Build a pluggable validation engine with six rule types: not-null, positive, in-set, valid-date, unique, and regex.</a:t>
+            </a:r>
+          </a:p>
+          <a:p>
+            <a:pPr marL="342900" indent="-342900">
+              <a:buFont typeface="Arial" pitchFamily="34" charset="0"/>
+              <a:buChar char="•"/>
+            </a:pPr>
+            <a:r>
+              <a:rPr lang="en-US" sz="1800" dirty="0">
+                <a:latin typeface="Calibri"/>
+              </a:rPr>
+              <a:t>Separate valid and invalid records, storing a clear, human-readable reason for every failed row (quarantine).</a:t>
+            </a:r>
+          </a:p>
+          <a:p>
+            <a:pPr marL="342900" indent="-342900">
+              <a:buFont typeface="Arial" pitchFamily="34" charset="0"/>
+              <a:buChar char="•"/>
+            </a:pPr>
+            <a:r>
+              <a:rPr lang="en-US" sz="1800" dirty="0">
+                <a:latin typeface="Calibri"/>
+              </a:rPr>
+              <a:t>Compute a dataset health score and generate validation reports that summarize the most common errors.</a:t>
+            </a:r>
+          </a:p>
+          <a:p>
+            <a:pPr marL="342900" indent="-342900">
+              <a:buFont typeface="Arial" pitchFamily="34" charset="0"/>
+              <a:buChar char="•"/>
+            </a:pPr>
+            <a:r>
+              <a:rPr lang="en-US" sz="1800" dirty="0">
+                <a:latin typeface="Calibri"/>
+              </a:rPr>
+              <a:t>Expose upload, validation, and reporting through a documented REST API using FastAPI and PostgreSQL.</a:t>
+            </a:r>
+          </a:p>
+          <a:p>
+            <a:pPr marL="342900" indent="-342900">
+              <a:buFont typeface="Arial" pitchFamily="34" charset="0"/>
+              <a:buChar char="•"/>
+            </a:pPr>
+            <a:r>
+              <a:rPr lang="en-US" sz="1800" dirty="0">
+                <a:latin typeface="Calibri"/>
+              </a:rPr>
+              <a:t>Ensure reproducibility and reliability via Docker, pytest testing, and CI/CD deployment to a free-tier cloud host.</a:t>
+            </a:r>
+          </a:p>
+        </p:txBody>
+      </p:sp>
+    </p:spTree>
+  </p:cSld>
+  <p:clrMapOvr>
+    <a:masterClrMapping/>
+  </p:clrMapOvr>
+</p:sld>
+</file>
+
+<file path=ppt/slides/slide6.xml><?xml version="1.0" encoding="utf-8"?>
+<p:sld xmlns:a="http://schemas.openxmlformats.org/drawingml/2006/main" xmlns:r="http://schemas.openxmlformats.org/officeDocument/2006/relationships" xmlns:p="http://schemas.openxmlformats.org/presentationml/2006/main">
+  <p:cSld name="Slide 2">
+    <p:bg>
+      <p:bgPr>
+        <a:solidFill>
+          <a:srgbClr val="FFFFFF"/>
+        </a:solidFill>
+        <a:effectLst/>
+      </p:bgPr>
+    </p:bg>
+    <p:spTree>
+      <p:nvGrpSpPr>
+        <p:cNvPr id="1" name=""/>
+        <p:cNvGrpSpPr/>
+        <p:nvPr/>
+      </p:nvGrpSpPr>
+      <p:grpSpPr>
+        <a:xfrm>
+          <a:off x="0" y="0"/>
+          <a:ext cx="0" cy="0"/>
+          <a:chOff x="0" y="0"/>
+          <a:chExt cx="0" cy="0"/>
+        </a:xfrm>
+      </p:grpSpPr>
+      <p:sp>
+        <p:nvSpPr>
+          <p:cNvPr id="3" name="Text 1"/>
+          <p:cNvSpPr/>
+          <p:nvPr/>
+        </p:nvSpPr>
+        <p:spPr>
+          <a:xfrm>
+            <a:off x="720872" y="-122405"/>
+            <a:ext cx="9144000" cy="1188720"/>
+          </a:xfrm>
+          <a:prstGeom prst="rect">
+            <a:avLst/>
+          </a:prstGeom>
+          <a:noFill/>
+          <a:ln/>
+        </p:spPr>
+        <p:txBody>
+          <a:bodyPr wrap="square" rtlCol="0" anchor="ctr"/>
+          <a:lstStyle/>
+          <a:p>
+            <a:pPr marL="0" indent="0">
+              <a:buNone/>
+            </a:pPr>
+            <a:r>
+              <a:rPr lang="en-US" sz="3200" b="1" dirty="0">
+                <a:latin typeface="Cambria" pitchFamily="34" charset="0"/>
+                <a:ea typeface="Cambria" pitchFamily="34" charset="-122"/>
+                <a:cs typeface="Cambria" pitchFamily="34" charset="-120"/>
+              </a:rPr>
+              <a:t>Existing Systems</a:t>
+            </a:r>
+            <a:endParaRPr lang="en-US" sz="3200" dirty="0"/>
+          </a:p>
+        </p:txBody>
+      </p:sp>
+      <p:pic>
+        <p:nvPicPr>
+          <p:cNvPr id="21" name="Image 0" descr="klh_logo.png">
+            <a:extLst>
+              <a:ext uri="{FF2B5EF4-FFF2-40B4-BE49-F238E27FC236}">
+                <a16:creationId xmlns:a16="http://schemas.microsoft.com/office/drawing/2014/main" id="{818D94E6-D6DF-ECD3-60A4-3FE0A3FBB180}"/>
+              </a:ext>
+            </a:extLst>
+          </p:cNvPr>
+          <p:cNvPicPr>
+            <a:picLocks noChangeAspect="1"/>
+          </p:cNvPicPr>
+          <p:nvPr/>
+        </p:nvPicPr>
+        <p:blipFill>
+          <a:blip r:embed="rId3"/>
+          <a:stretch>
+            <a:fillRect/>
+          </a:stretch>
+        </p:blipFill>
+        <p:spPr>
+          <a:xfrm>
+            <a:off x="10039265" y="160020"/>
+            <a:ext cx="1902045" cy="623871"/>
+          </a:xfrm>
+          <a:prstGeom prst="rect">
+            <a:avLst/>
+          </a:prstGeom>
+        </p:spPr>
+      </p:pic>
+      <p:sp>
+        <p:nvSpPr>
+          <p:cNvPr id="24" name="Body"/>
+          <p:cNvSpPr txBox="1"/>
+          <p:nvPr/>
+        </p:nvSpPr>
+        <p:spPr>
+          <a:xfrm>
+            <a:off x="720872" y="1000000"/>
+            <a:ext cx="10890460" cy="5150000"/>
+          </a:xfrm>
+          <a:prstGeom prst="rect">
+            <a:avLst/>
+          </a:prstGeom>
+          <a:noFill/>
+        </p:spPr>
+        <p:txBody>
+          <a:bodyPr wrap="square">
+            <a:normAutofit/>
+          </a:bodyPr>
+          <a:lstStyle/>
+          <a:p>
+            <a:pPr marL="342900" indent="-342900">
+              <a:buFont typeface="Arial" pitchFamily="34" charset="0"/>
+              <a:buChar char="•"/>
+            </a:pPr>
+            <a:r>
+              <a:rPr lang="en-US" sz="1700" b="1" dirty="0">
+                <a:latin typeface="Calibri"/>
+              </a:rPr>
+              <a:t>Manual / ad-hoc checks: </a:t>
+            </a:r>
+            <a:r>
+              <a:rPr lang="en-US" sz="1700" dirty="0">
+                <a:latin typeface="Calibri"/>
+              </a:rPr>
+              <a:t>SQL scripts, spreadsheet checks, and custom scripts written per pipeline to spot bad data.</a:t>
+            </a:r>
+          </a:p>
+          <a:p>
+            <a:pPr marL="342900" indent="-342900">
+              <a:buFont typeface="Arial" pitchFamily="34" charset="0"/>
+              <a:buChar char="•"/>
+            </a:pPr>
+            <a:r>
+              <a:rPr lang="en-US" sz="1700" b="1" dirty="0">
+                <a:latin typeface="Calibri"/>
+              </a:rPr>
+              <a:t>ETL / ELT tools: </a:t>
+            </a:r>
+            <a:r>
+              <a:rPr lang="en-US" sz="1700" dirty="0">
+                <a:latin typeface="Calibri"/>
+              </a:rPr>
+              <a:t>Informatica, Talend, and dbt tests provide basic validation as part of data movement.</a:t>
+            </a:r>
+          </a:p>
+          <a:p>
+            <a:pPr marL="342900" indent="-342900">
+              <a:buFont typeface="Arial" pitchFamily="34" charset="0"/>
+              <a:buChar char="•"/>
+            </a:pPr>
+            <a:r>
+              <a:rPr lang="en-US" sz="1700" b="1" dirty="0">
+                <a:latin typeface="Calibri"/>
+              </a:rPr>
+              <a:t>Dedicated data-quality frameworks: </a:t>
+            </a:r>
+            <a:r>
+              <a:rPr lang="en-US" sz="1700" dirty="0">
+                <a:latin typeface="Calibri"/>
+              </a:rPr>
+              <a:t>Amazon Deequ (constraint-based, on Spark), Great Expectations (Python expectation suites), and Soda.</a:t>
+            </a:r>
+          </a:p>
+          <a:p>
+            <a:pPr marL="342900" indent="-342900">
+              <a:buFont typeface="Arial" pitchFamily="34" charset="0"/>
+              <a:buChar char="•"/>
+            </a:pPr>
+            <a:r>
+              <a:rPr lang="en-US" sz="1700" b="1" dirty="0">
+                <a:latin typeface="Calibri"/>
+              </a:rPr>
+              <a:t>ML data validation: </a:t>
+            </a:r>
+            <a:r>
+              <a:rPr lang="en-US" sz="1700" dirty="0">
+                <a:latin typeface="Calibri"/>
+              </a:rPr>
+              <a:t>Google TFDV validates data against a schema inside TensorFlow/TFX machine-learning pipelines.</a:t>
+            </a:r>
+          </a:p>
+          <a:p>
+            <a:pPr marL="342900" indent="-342900">
+              <a:buFont typeface="Arial" pitchFamily="34" charset="0"/>
+              <a:buChar char="•"/>
+            </a:pPr>
+            <a:r>
+              <a:rPr lang="en-US" sz="1700" b="1" dirty="0">
+                <a:latin typeface="Calibri"/>
+              </a:rPr>
+              <a:t>Cloud data-quality services: </a:t>
+            </a:r>
+            <a:r>
+              <a:rPr lang="en-US" sz="1700" dirty="0">
+                <a:latin typeface="Calibri"/>
+              </a:rPr>
+              <a:t>AWS Glue Data Quality and similar managed offerings within large cloud platforms.</a:t>
+            </a:r>
+          </a:p>
+        </p:txBody>
+      </p:sp>
+    </p:spTree>
+  </p:cSld>
+  <p:clrMapOvr>
+    <a:masterClrMapping/>
+  </p:clrMapOvr>
+</p:sld>
+</file>
+
+<file path=ppt/slides/slide7.xml><?xml version="1.0" encoding="utf-8"?>
+<p:sld xmlns:a="http://schemas.openxmlformats.org/drawingml/2006/main" xmlns:r="http://schemas.openxmlformats.org/officeDocument/2006/relationships" xmlns:p="http://schemas.openxmlformats.org/presentationml/2006/main">
+  <p:cSld name="Slide 2">
+    <p:bg>
+      <p:bgPr>
+        <a:solidFill>
+          <a:srgbClr val="FFFFFF"/>
+        </a:solidFill>
+        <a:effectLst/>
+      </p:bgPr>
+    </p:bg>
+    <p:spTree>
+      <p:nvGrpSpPr>
+        <p:cNvPr id="1" name=""/>
+        <p:cNvGrpSpPr/>
+        <p:nvPr/>
+      </p:nvGrpSpPr>
+      <p:grpSpPr>
+        <a:xfrm>
+          <a:off x="0" y="0"/>
+          <a:ext cx="0" cy="0"/>
+          <a:chOff x="0" y="0"/>
+          <a:chExt cx="0" cy="0"/>
+        </a:xfrm>
+      </p:grpSpPr>
+      <p:sp>
+        <p:nvSpPr>
+          <p:cNvPr id="3" name="Text 1"/>
+          <p:cNvSpPr/>
+          <p:nvPr/>
+        </p:nvSpPr>
+        <p:spPr>
+          <a:xfrm>
+            <a:off x="720872" y="-122405"/>
+            <a:ext cx="9144000" cy="1188720"/>
+          </a:xfrm>
+          <a:prstGeom prst="rect">
+            <a:avLst/>
+          </a:prstGeom>
+          <a:noFill/>
+          <a:ln/>
+        </p:spPr>
+        <p:txBody>
+          <a:bodyPr wrap="square" rtlCol="0" anchor="ctr"/>
+          <a:lstStyle/>
+          <a:p>
+            <a:pPr marL="0" indent="0">
+              <a:buNone/>
+            </a:pPr>
+            <a:r>
+              <a:rPr lang="en-US" sz="3200" b="1" dirty="0">
+                <a:latin typeface="Cambria" pitchFamily="34" charset="0"/>
+                <a:ea typeface="Cambria" pitchFamily="34" charset="-122"/>
+                <a:cs typeface="Cambria" pitchFamily="34" charset="-120"/>
+              </a:rPr>
+              <a:t>Limitations of Existing Systems</a:t>
+            </a:r>
+            <a:endParaRPr lang="en-US" sz="3200" dirty="0"/>
+          </a:p>
+        </p:txBody>
+      </p:sp>
+      <p:pic>
+        <p:nvPicPr>
+          <p:cNvPr id="21" name="Image 0" descr="klh_logo.png">
+            <a:extLst>
+              <a:ext uri="{FF2B5EF4-FFF2-40B4-BE49-F238E27FC236}">
+                <a16:creationId xmlns:a16="http://schemas.microsoft.com/office/drawing/2014/main" id="{818D94E6-D6DF-ECD3-60A4-3FE0A3FBB180}"/>
+              </a:ext>
+            </a:extLst>
+          </p:cNvPr>
+          <p:cNvPicPr>
+            <a:picLocks noChangeAspect="1"/>
+          </p:cNvPicPr>
+          <p:nvPr/>
+        </p:nvPicPr>
+        <p:blipFill>
+          <a:blip r:embed="rId3"/>
+          <a:stretch>
+            <a:fillRect/>
+          </a:stretch>
+        </p:blipFill>
+        <p:spPr>
+          <a:xfrm>
+            <a:off x="10039265" y="160020"/>
+            <a:ext cx="1902045" cy="623871"/>
+          </a:xfrm>
+          <a:prstGeom prst="rect">
+            <a:avLst/>
+          </a:prstGeom>
+        </p:spPr>
+      </p:pic>
+      <p:sp>
+        <p:nvSpPr>
+          <p:cNvPr id="24" name="Body"/>
+          <p:cNvSpPr txBox="1"/>
+          <p:nvPr/>
+        </p:nvSpPr>
+        <p:spPr>
+          <a:xfrm>
+            <a:off x="720872" y="1000000"/>
+            <a:ext cx="10890460" cy="5150000"/>
+          </a:xfrm>
+          <a:prstGeom prst="rect">
+            <a:avLst/>
+          </a:prstGeom>
+          <a:noFill/>
+        </p:spPr>
+        <p:txBody>
+          <a:bodyPr wrap="square">
+            <a:normAutofit/>
+          </a:bodyPr>
+          <a:lstStyle/>
+          <a:p>
+            <a:pPr marL="342900" indent="-342900">
+              <a:buFont typeface="Arial" pitchFamily="34" charset="0"/>
+              <a:buChar char="•"/>
+            </a:pPr>
+            <a:r>
+              <a:rPr lang="en-US" sz="1700" b="1" dirty="0">
+                <a:latin typeface="Calibri"/>
+              </a:rPr>
+              <a:t>Infrastructure-heavy: </a:t>
+            </a:r>
+            <a:r>
+              <a:rPr lang="en-US" sz="1700" dirty="0">
+                <a:latin typeface="Calibri"/>
+              </a:rPr>
+              <a:t>Deequ needs Spark and TFDV is tied to TensorFlow — hard for small teams or general datasets to adopt.</a:t>
+            </a:r>
+          </a:p>
+          <a:p>
+            <a:pPr marL="342900" indent="-342900">
+              <a:buFont typeface="Arial" pitchFamily="34" charset="0"/>
+              <a:buChar char="•"/>
+            </a:pPr>
+            <a:r>
+              <a:rPr lang="en-US" sz="1700" b="1" dirty="0">
+                <a:latin typeface="Calibri"/>
+              </a:rPr>
+              <a:t>Weak explainability: </a:t>
+            </a:r>
+            <a:r>
+              <a:rPr lang="en-US" sz="1700" dirty="0">
+                <a:latin typeface="Calibri"/>
+              </a:rPr>
+              <a:t>many tools flag issues but do not preserve every bad row with a clear, per-row reason.</a:t>
+            </a:r>
+          </a:p>
+          <a:p>
+            <a:pPr marL="342900" indent="-342900">
+              <a:buFont typeface="Arial" pitchFamily="34" charset="0"/>
+              <a:buChar char="•"/>
+            </a:pPr>
+            <a:r>
+              <a:rPr lang="en-US" sz="1700" b="1" dirty="0">
+                <a:latin typeface="Calibri"/>
+              </a:rPr>
+              <a:t>Manual thresholds: </a:t>
+            </a:r>
+            <a:r>
+              <a:rPr lang="en-US" sz="1700" dirty="0">
+                <a:latin typeface="Calibri"/>
+              </a:rPr>
+              <a:t>rules and thresholds must be hand-defined and maintained, and break when data legitimately changes.</a:t>
+            </a:r>
+          </a:p>
+          <a:p>
+            <a:pPr marL="342900" indent="-342900">
+              <a:buFont typeface="Arial" pitchFamily="34" charset="0"/>
+              <a:buChar char="•"/>
+            </a:pPr>
+            <a:r>
+              <a:rPr lang="en-US" sz="1700" b="1" dirty="0">
+                <a:latin typeface="Calibri"/>
+              </a:rPr>
+              <a:t>Fragmented tooling: </a:t>
+            </a:r>
+            <a:r>
+              <a:rPr lang="en-US" sz="1700" dirty="0">
+                <a:latin typeface="Calibri"/>
+              </a:rPr>
+              <a:t>validation, reporting, and storage often live in separate tools — no single, accessible platform.</a:t>
+            </a:r>
+          </a:p>
+          <a:p>
+            <a:pPr marL="342900" indent="-342900">
+              <a:buFont typeface="Arial" pitchFamily="34" charset="0"/>
+              <a:buChar char="•"/>
+            </a:pPr>
+            <a:r>
+              <a:rPr lang="en-US" sz="1700" b="1" dirty="0">
+                <a:latin typeface="Calibri"/>
+              </a:rPr>
+              <a:t>Load-first culture: </a:t>
+            </a:r>
+            <a:r>
+              <a:rPr lang="en-US" sz="1700" dirty="0">
+                <a:latin typeface="Calibri"/>
+              </a:rPr>
+              <a:t>most pipelines load data first and discover errors later (or never) — there is no gate before use.</a:t>
+            </a:r>
+          </a:p>
+          <a:p>
+            <a:pPr marL="342900" indent="-342900">
+              <a:buFont typeface="Arial" pitchFamily="34" charset="0"/>
+              <a:buChar char="•"/>
+            </a:pPr>
+            <a:r>
+              <a:rPr lang="en-US" sz="1700" b="1" dirty="0">
+                <a:latin typeface="Calibri"/>
+              </a:rPr>
+              <a:t>Low transparency: </a:t>
+            </a:r>
+            <a:r>
+              <a:rPr lang="en-US" sz="1700" dirty="0">
+                <a:latin typeface="Calibri"/>
+              </a:rPr>
+              <a:t>complex systems that are hard for a student team to fully explain or extend.</a:t>
+            </a:r>
+          </a:p>
+        </p:txBody>
+      </p:sp>
+    </p:spTree>
+  </p:cSld>
+  <p:clrMapOvr>
+    <a:masterClrMapping/>
+  </p:clrMapOvr>
+</p:sld>
+</file>
+
+<file path=ppt/slides/slide8.xml><?xml version="1.0" encoding="utf-8"?>
+<p:sld xmlns:a="http://schemas.openxmlformats.org/drawingml/2006/main" xmlns:r="http://schemas.openxmlformats.org/officeDocument/2006/relationships" xmlns:p="http://schemas.openxmlformats.org/presentationml/2006/main">
+  <p:cSld name="Slide 2">
+    <p:bg>
+      <p:bgPr>
+        <a:solidFill>
+          <a:srgbClr val="FFFFFF"/>
+        </a:solidFill>
+        <a:effectLst/>
+      </p:bgPr>
+    </p:bg>
+    <p:spTree>
+      <p:nvGrpSpPr>
+        <p:cNvPr id="1" name=""/>
+        <p:cNvGrpSpPr/>
+        <p:nvPr/>
+      </p:nvGrpSpPr>
+      <p:grpSpPr>
+        <a:xfrm>
+          <a:off x="0" y="0"/>
+          <a:ext cx="0" cy="0"/>
+          <a:chOff x="0" y="0"/>
+          <a:chExt cx="0" cy="0"/>
+        </a:xfrm>
+      </p:grpSpPr>
+      <p:sp>
+        <p:nvSpPr>
+          <p:cNvPr id="3" name="Text 1"/>
+          <p:cNvSpPr/>
+          <p:nvPr/>
+        </p:nvSpPr>
+        <p:spPr>
+          <a:xfrm>
+            <a:off x="720872" y="-122405"/>
+            <a:ext cx="9144000" cy="1188720"/>
+          </a:xfrm>
+          <a:prstGeom prst="rect">
+            <a:avLst/>
+          </a:prstGeom>
+          <a:noFill/>
+          <a:ln/>
+        </p:spPr>
+        <p:txBody>
+          <a:bodyPr wrap="square" rtlCol="0" anchor="ctr"/>
+          <a:lstStyle/>
+          <a:p>
+            <a:pPr marL="0" indent="0">
+              <a:buNone/>
+            </a:pPr>
+            <a:r>
+              <a:rPr lang="en-US" sz="3200" b="1" dirty="0">
+                <a:latin typeface="Cambria" pitchFamily="34" charset="0"/>
+                <a:ea typeface="Cambria" pitchFamily="34" charset="-122"/>
+                <a:cs typeface="Cambria" pitchFamily="34" charset="-120"/>
+              </a:rPr>
+              <a:t>Proposed Solution</a:t>
+            </a:r>
+            <a:endParaRPr lang="en-US" sz="3200" dirty="0"/>
+          </a:p>
+        </p:txBody>
+      </p:sp>
+      <p:pic>
+        <p:nvPicPr>
+          <p:cNvPr id="21" name="Image 0" descr="klh_logo.png">
+            <a:extLst>
+              <a:ext uri="{FF2B5EF4-FFF2-40B4-BE49-F238E27FC236}">
+                <a16:creationId xmlns:a16="http://schemas.microsoft.com/office/drawing/2014/main" id="{818D94E6-D6DF-ECD3-60A4-3FE0A3FBB180}"/>
+              </a:ext>
+            </a:extLst>
+          </p:cNvPr>
+          <p:cNvPicPr>
+            <a:picLocks noChangeAspect="1"/>
+          </p:cNvPicPr>
+          <p:nvPr/>
+        </p:nvPicPr>
+        <p:blipFill>
+          <a:blip r:embed="rId3"/>
+          <a:stretch>
+            <a:fillRect/>
+          </a:stretch>
+        </p:blipFill>
+        <p:spPr>
+          <a:xfrm>
+            <a:off x="10039265" y="160020"/>
+            <a:ext cx="1902045" cy="623871"/>
+          </a:xfrm>
+          <a:prstGeom prst="rect">
+            <a:avLst/>
+          </a:prstGeom>
+        </p:spPr>
+      </p:pic>
+      <p:sp>
+        <p:nvSpPr>
+          <p:cNvPr id="24" name="Body"/>
+          <p:cNvSpPr txBox="1"/>
+          <p:nvPr/>
+        </p:nvSpPr>
+        <p:spPr>
+          <a:xfrm>
+            <a:off x="720872" y="1000000"/>
+            <a:ext cx="10890460" cy="5150000"/>
+          </a:xfrm>
+          <a:prstGeom prst="rect">
+            <a:avLst/>
+          </a:prstGeom>
+          <a:noFill/>
+        </p:spPr>
+        <p:txBody>
+          <a:bodyPr wrap="square">
+            <a:normAutofit/>
+          </a:bodyPr>
+          <a:lstStyle/>
+          <a:p>
+            <a:pPr marL="0" indent="0">
+              <a:buNone/>
+            </a:pPr>
+            <a:r>
+              <a:rPr lang="en-US" sz="1900" b="1" dirty="0">
+                <a:latin typeface="Calibri"/>
+              </a:rPr>
+              <a:t>Sentinel: a lightweight, transparent, framework-agnostic data reliability platform.</a:t>
+            </a:r>
+          </a:p>
+          <a:p>
+            <a:pPr marL="0" indent="0">
+              <a:buNone/>
+            </a:pPr>
+            <a:endParaRPr lang="en-US" sz="700"/>
+          </a:p>
+          <a:p>
+            <a:pPr marL="342900" indent="-342900">
+              <a:buFont typeface="Arial" pitchFamily="34" charset="0"/>
+              <a:buChar char="•"/>
+            </a:pPr>
+            <a:r>
+              <a:rPr lang="en-US" sz="1700" b="1" dirty="0">
+                <a:latin typeface="Calibri"/>
+              </a:rPr>
+              <a:t>Declarative data contracts: </a:t>
+            </a:r>
+            <a:r>
+              <a:rPr lang="en-US" sz="1700" dirty="0">
+                <a:latin typeface="Calibri"/>
+              </a:rPr>
+              <a:t>validation rules stored as configuration, not hardcoded logic.</a:t>
+            </a:r>
+          </a:p>
+          <a:p>
+            <a:pPr marL="342900" indent="-342900">
+              <a:buFont typeface="Arial" pitchFamily="34" charset="0"/>
+              <a:buChar char="•"/>
+            </a:pPr>
+            <a:r>
+              <a:rPr lang="en-US" sz="1700" b="1" dirty="0">
+                <a:latin typeface="Calibri"/>
+              </a:rPr>
+              <a:t>Pluggable rule engine: </a:t>
+            </a:r>
+            <a:r>
+              <a:rPr lang="en-US" sz="1700" dirty="0">
+                <a:latin typeface="Calibri"/>
+              </a:rPr>
+              <a:t>six rule types (not-null, positive, in-set, valid-date, unique, regex), easy to extend.</a:t>
+            </a:r>
+          </a:p>
+          <a:p>
+            <a:pPr marL="342900" indent="-342900">
+              <a:buFont typeface="Arial" pitchFamily="34" charset="0"/>
+              <a:buChar char="•"/>
+            </a:pPr>
+            <a:r>
+              <a:rPr lang="en-US" sz="1700" b="1" dirty="0">
+                <a:latin typeface="Calibri"/>
+              </a:rPr>
+              <a:t>Non-destructive quarantine: </a:t>
+            </a:r>
+            <a:r>
+              <a:rPr lang="en-US" sz="1700" dirty="0">
+                <a:latin typeface="Calibri"/>
+              </a:rPr>
+              <a:t>bad rows preserved with a human-readable reason for every failure.</a:t>
+            </a:r>
+          </a:p>
+          <a:p>
+            <a:pPr marL="342900" indent="-342900">
+              <a:buFont typeface="Arial" pitchFamily="34" charset="0"/>
+              <a:buChar char="•"/>
+            </a:pPr>
+            <a:r>
+              <a:rPr lang="en-US" sz="1700" b="1" dirty="0">
+                <a:latin typeface="Calibri"/>
+              </a:rPr>
+              <a:t>Health score + reports: </a:t>
+            </a:r>
+            <a:r>
+              <a:rPr lang="en-US" sz="1700" dirty="0">
+                <a:latin typeface="Calibri"/>
+              </a:rPr>
+              <a:t>a clear quality score and summary per dataset.</a:t>
+            </a:r>
+          </a:p>
+          <a:p>
+            <a:pPr marL="342900" indent="-342900">
+              <a:buFont typeface="Arial" pitchFamily="34" charset="0"/>
+              <a:buChar char="•"/>
+            </a:pPr>
+            <a:r>
+              <a:rPr lang="en-US" sz="1700" b="1" dirty="0">
+                <a:latin typeface="Calibri"/>
+              </a:rPr>
+              <a:t>Accessible: </a:t>
+            </a:r>
+            <a:r>
+              <a:rPr lang="en-US" sz="1700" dirty="0">
+                <a:latin typeface="Calibri"/>
+              </a:rPr>
+              <a:t>REST API and a simple dashboard; runs anywhere via Docker — no Spark or TensorFlow needed.</a:t>
+            </a:r>
+          </a:p>
+          <a:p>
+            <a:pPr marL="342900" indent="-342900">
+              <a:buFont typeface="Arial" pitchFamily="34" charset="0"/>
+              <a:buChar char="•"/>
+            </a:pPr>
+            <a:r>
+              <a:rPr lang="en-US" sz="1700" b="1" dirty="0">
+                <a:latin typeface="Calibri"/>
+              </a:rPr>
+              <a:t>Extensible roadmap: </a:t>
+            </a:r>
+            <a:r>
+              <a:rPr lang="en-US" sz="1700" dirty="0">
+                <a:latin typeface="Calibri"/>
+              </a:rPr>
+              <a:t>automated pipelines (Sem 2) and streaming AI-telemetry governance (Sem 3).</a:t>
+            </a:r>
+          </a:p>
+        </p:txBody>
+      </p:sp>
+    </p:spTree>
+  </p:cSld>
+  <p:clrMapOvr>
+    <a:masterClrMapping/>
+  </p:clrMapOvr>
+</p:sld>
+</file>
+
+<file path=ppt/slides/slide9.xml><?xml version="1.0" encoding="utf-8"?>
+<p:sld xmlns:a="http://schemas.openxmlformats.org/drawingml/2006/main" xmlns:r="http://schemas.openxmlformats.org/officeDocument/2006/relationships" xmlns:p="http://schemas.openxmlformats.org/presentationml/2006/main">
+  <p:cSld name="Slide 2">
+    <p:bg>
+      <p:bgPr>
+        <a:solidFill>
+          <a:srgbClr val="FFFFFF"/>
+        </a:solidFill>
+        <a:effectLst/>
+      </p:bgPr>
+    </p:bg>
+    <p:spTree>
+      <p:nvGrpSpPr>
+        <p:cNvPr id="1" name=""/>
+        <p:cNvGrpSpPr/>
+        <p:nvPr/>
+      </p:nvGrpSpPr>
+      <p:grpSpPr>
+        <a:xfrm>
+          <a:off x="0" y="0"/>
+          <a:ext cx="0" cy="0"/>
+          <a:chOff x="0" y="0"/>
+          <a:chExt cx="0" cy="0"/>
+        </a:xfrm>
+      </p:grpSpPr>
+      <p:sp>
+        <p:nvSpPr>
+          <p:cNvPr id="3" name="Text 1"/>
+          <p:cNvSpPr/>
+          <p:nvPr/>
+        </p:nvSpPr>
+        <p:spPr>
+          <a:xfrm>
+            <a:off x="720872" y="-122405"/>
+            <a:ext cx="9144000" cy="1188720"/>
+          </a:xfrm>
+          <a:prstGeom prst="rect">
+            <a:avLst/>
+          </a:prstGeom>
+          <a:noFill/>
+          <a:ln/>
+        </p:spPr>
+        <p:txBody>
+          <a:bodyPr wrap="square" rtlCol="0" anchor="ctr"/>
+          <a:lstStyle/>
+          <a:p>
+            <a:pPr marL="0" indent="0">
+              <a:buNone/>
+            </a:pPr>
+            <a:r>
+              <a:rPr lang="en-US" sz="3200" b="1" dirty="0">
+                <a:latin typeface="Cambria" pitchFamily="34" charset="0"/>
+                <a:ea typeface="Cambria" pitchFamily="34" charset="-122"/>
+                <a:cs typeface="Cambria" pitchFamily="34" charset="-120"/>
+              </a:rPr>
+              <a:t>Hardware &amp; Software Requirements</a:t>
+            </a:r>
+            <a:endParaRPr lang="en-US" sz="3200" dirty="0"/>
+          </a:p>
+        </p:txBody>
+      </p:sp>
+      <p:pic>
+        <p:nvPicPr>
+          <p:cNvPr id="21" name="Image 0" descr="klh_logo.png">
+            <a:extLst>
+              <a:ext uri="{FF2B5EF4-FFF2-40B4-BE49-F238E27FC236}">
+                <a16:creationId xmlns:a16="http://schemas.microsoft.com/office/drawing/2014/main" id="{818D94E6-D6DF-ECD3-60A4-3FE0A3FBB180}"/>
+              </a:ext>
+            </a:extLst>
+          </p:cNvPr>
+          <p:cNvPicPr>
+            <a:picLocks noChangeAspect="1"/>
+          </p:cNvPicPr>
+          <p:nvPr/>
+        </p:nvPicPr>
+        <p:blipFill>
+          <a:blip r:embed="rId3"/>
+          <a:stretch>
+            <a:fillRect/>
+          </a:stretch>
+        </p:blipFill>
+        <p:spPr>
+          <a:xfrm>
+            <a:off x="10039265" y="160020"/>
+            <a:ext cx="1902045" cy="623871"/>
+          </a:xfrm>
+          <a:prstGeom prst="rect">
+            <a:avLst/>
+          </a:prstGeom>
+        </p:spPr>
+      </p:pic>
+      <p:graphicFrame>
+        <p:nvGraphicFramePr>
+          <p:cNvPr id="40" name="Tbl"/>
+          <p:cNvGraphicFramePr/>
+          <p:nvPr/>
+        </p:nvGraphicFramePr>
+        <p:xfrm>
+          <a:off x="720872" y="1000000"/>
+          <a:ext cx="10890460" cy="4900000"/>
+        </p:xfrm>
+        <a:graphic>
+          <a:graphicData uri="http://schemas.openxmlformats.org/drawingml/2006/table">
+            <a:tbl>
+              <a:tblPr firstRow="1">
+                <a:tableStyleId>{5940675A-B579-460E-94D1-54222C63F5DA}</a:tableStyleId>
+              </a:tblPr>
+              <a:tblGrid>
+                <a:gridCol w="3400000"/>
+                <a:gridCol w="7490460"/>
+              </a:tblGrid>
+              <a:tr h="360000">
+                <a:tc>
+                  <a:txBody>
+                    <a:bodyPr/>
+                    <a:lstStyle/>
+                    <a:p>
+                      <a:pPr algn="ctr"/>
+                      <a:r>
+                        <a:rPr lang="en-US" sz="1300" b="1" dirty="0">
+                          <a:solidFill>
+                            <a:srgbClr val="FFFFFF"/>
+                          </a:solidFill>
+                          <a:latin typeface="Cambria"/>
+                        </a:rPr>
+                        <a:t>Category</a:t>
+                      </a:r>
+                    </a:p>
+                  </a:txBody>
+                  <a:tcPr marL="54000" marR="54000" marT="24000" marB="24000" anchor="ctr">
+                    <a:solidFill>
+                      <a:srgbClr val="8C1D40"/>
+                    </a:solidFill>
+                  </a:tcPr>
+                </a:tc>
+                <a:tc>
+                  <a:txBody>
+                    <a:bodyPr/>
+                    <a:lstStyle/>
+                    <a:p>
+                      <a:pPr algn="ctr"/>
+                      <a:r>
+                        <a:rPr lang="en-US" sz="1300" b="1" dirty="0">
+                          <a:solidFill>
+                            <a:srgbClr val="FFFFFF"/>
+                          </a:solidFill>
+                          <a:latin typeface="Cambria"/>
+                        </a:rPr>
+                        <a:t>Requirement</a:t>
+                      </a:r>
+                    </a:p>
+                  </a:txBody>
+                  <a:tcPr marL="54000" marR="54000" marT="24000" marB="24000" anchor="ctr">
+                    <a:solidFill>
+                      <a:srgbClr val="8C1D40"/>
+                    </a:solidFill>
+                  </a:tcPr>
+                </a:tc>
+              </a:tr>
+              <a:tr h="470000">
+                <a:tc>
+                  <a:txBody>
+                    <a:bodyPr/>
+                    <a:lstStyle/>
+                    <a:p>
+                      <a:pPr/>
+                      <a:r>
+                        <a:rPr lang="en-US" sz="1200" dirty="0">
+                          <a:latin typeface="Calibri"/>
+                        </a:rPr>
+                        <a:t>Development machine</a:t>
+                      </a:r>
+                    </a:p>
+                  </a:txBody>
+                  <a:tcPr marL="54000" marR="54000" marT="24000" marB="24000" anchor="ctr"/>
+                </a:tc>
+                <a:tc>
+                  <a:txBody>
+                    <a:bodyPr/>
+                    <a:lstStyle/>
+                    <a:p>
+                      <a:pPr/>
+                      <a:r>
+                        <a:rPr lang="en-US" sz="1200" dirty="0">
+                          <a:latin typeface="Calibri"/>
+                        </a:rPr>
+                        <a:t>Any laptop; 8 GB RAM (16 GB recommended); 4-core CPU; ~5 GB free disk</a:t>
+                      </a:r>
+                    </a:p>
+                  </a:txBody>
+                  <a:tcPr marL="54000" marR="54000" marT="24000" marB="24000" anchor="ctr"/>
+                </a:tc>
+              </a:tr>
+              <a:tr h="470000">
+                <a:tc>
+                  <a:txBody>
+                    <a:bodyPr/>
+                    <a:lstStyle/>
+                    <a:p>
+                      <a:pPr/>
+                      <a:r>
+                        <a:rPr lang="en-US" sz="1200" dirty="0">
+                          <a:latin typeface="Calibri"/>
+                        </a:rPr>
+                        <a:t>Operating system</a:t>
+                      </a:r>
+                    </a:p>
+                  </a:txBody>
+                  <a:tcPr marL="54000" marR="54000" marT="24000" marB="24000" anchor="ctr"/>
+                </a:tc>
+                <a:tc>
+                  <a:txBody>
+                    <a:bodyPr/>
+                    <a:lstStyle/>
+                    <a:p>
+                      <a:pPr/>
+                      <a:r>
+                        <a:rPr lang="en-US" sz="1200" dirty="0">
+                          <a:latin typeface="Calibri"/>
+                        </a:rPr>
+                        <a:t>Windows, macOS, or Linux</a:t>
+                      </a:r>
+                    </a:p>
+                  </a:txBody>
+                  <a:tcPr marL="54000" marR="54000" marT="24000" marB="24000" anchor="ctr"/>
+                </a:tc>
+              </a:tr>
+              <a:tr h="470000">
+                <a:tc>
+                  <a:txBody>
+                    <a:bodyPr/>
+                    <a:lstStyle/>
+                    <a:p>
+                      <a:pPr/>
+                      <a:r>
+                        <a:rPr lang="en-US" sz="1200" dirty="0">
+                          <a:latin typeface="Calibri"/>
+                        </a:rPr>
+                        <a:t>Containerization</a:t>
+                      </a:r>
+                    </a:p>
+                  </a:txBody>
+                  <a:tcPr marL="54000" marR="54000" marT="24000" marB="24000" anchor="ctr"/>
+                </a:tc>
+                <a:tc>
+                  <a:txBody>
+                    <a:bodyPr/>
+                    <a:lstStyle/>
+                    <a:p>
+                      <a:pPr/>
+                      <a:r>
+                        <a:rPr lang="en-US" sz="1200" dirty="0">
+                          <a:latin typeface="Calibri"/>
+                        </a:rPr>
+                        <a:t>Docker Desktop with Docker Compose v2+</a:t>
+                      </a:r>
+                    </a:p>
+                  </a:txBody>
+                  <a:tcPr marL="54000" marR="54000" marT="24000" marB="24000" anchor="ctr"/>
+                </a:tc>
+              </a:tr>
+              <a:tr h="470000">
+                <a:tc>
+                  <a:txBody>
+                    <a:bodyPr/>
+                    <a:lstStyle/>
+                    <a:p>
+                      <a:pPr/>
+                      <a:r>
+                        <a:rPr lang="en-US" sz="1200" dirty="0">
+                          <a:latin typeface="Calibri"/>
+                        </a:rPr>
+                        <a:t>Language / runtime</a:t>
+                      </a:r>
+                    </a:p>
+                  </a:txBody>
+                  <a:tcPr marL="54000" marR="54000" marT="24000" marB="24000" anchor="ctr"/>
+                </a:tc>
+                <a:tc>
+                  <a:txBody>
+                    <a:bodyPr/>
+                    <a:lstStyle/>
+                    <a:p>
+                      <a:pPr/>
+                      <a:r>
+                        <a:rPr lang="en-US" sz="1200" dirty="0">
+                          <a:latin typeface="Calibri"/>
+                        </a:rPr>
+                        <a:t>Python 3.12</a:t>
+                      </a:r>
+                    </a:p>
+                  </a:txBody>
+                  <a:tcPr marL="54000" marR="54000" marT="24000" marB="24000" anchor="ctr"/>
+                </a:tc>
+              </a:tr>
+              <a:tr h="470000">
+                <a:tc>
+                  <a:txBody>
+                    <a:bodyPr/>
+                    <a:lstStyle/>
+                    <a:p>
+                      <a:pPr/>
+                      <a:r>
+                        <a:rPr lang="en-US" sz="1200" dirty="0">
+                          <a:latin typeface="Calibri"/>
+                        </a:rPr>
+                        <a:t>Database</a:t>
+                      </a:r>
+                    </a:p>
+                  </a:txBody>
+                  <a:tcPr marL="54000" marR="54000" marT="24000" marB="24000" anchor="ctr"/>
+                </a:tc>
+                <a:tc>
+                  <a:txBody>
+                    <a:bodyPr/>
+                    <a:lstStyle/>
+                    <a:p>
+                      <a:pPr/>
+                      <a:r>
+                        <a:rPr lang="en-US" sz="1200" dirty="0">
+                          <a:latin typeface="Calibri"/>
+                        </a:rPr>
+                        <a:t>PostgreSQL 16 (run via Docker)</a:t>
+                      </a:r>
+                    </a:p>
+                  </a:txBody>
+                  <a:tcPr marL="54000" marR="54000" marT="24000" marB="24000" anchor="ctr"/>
+                </a:tc>
+              </a:tr>
+              <a:tr h="470000">
+                <a:tc>
+                  <a:txBody>
+                    <a:bodyPr/>
+                    <a:lstStyle/>
+                    <a:p>
+                      <a:pPr/>
+                      <a:r>
+                        <a:rPr lang="en-US" sz="1200" dirty="0">
+                          <a:latin typeface="Calibri"/>
+                        </a:rPr>
+                        <a:t>Backend libraries</a:t>
+                      </a:r>
+                    </a:p>
+                  </a:txBody>
+                  <a:tcPr marL="54000" marR="54000" marT="24000" marB="24000" anchor="ctr"/>
+                </a:tc>
+                <a:tc>
+                  <a:txBody>
+                    <a:bodyPr/>
+                    <a:lstStyle/>
+                    <a:p>
+                      <a:pPr/>
+                      <a:r>
+                        <a:rPr lang="en-US" sz="1200" dirty="0">
+                          <a:latin typeface="Calibri"/>
+                        </a:rPr>
+                        <a:t>FastAPI, SQLAlchemy, Pydantic, pytest</a:t>
+                      </a:r>
+                    </a:p>
+                  </a:txBody>
+                  <a:tcPr marL="54000" marR="54000" marT="24000" marB="24000" anchor="ctr"/>
+                </a:tc>
+              </a:tr>
+              <a:tr h="470000">
+                <a:tc>
+                  <a:txBody>
+                    <a:bodyPr/>
+                    <a:lstStyle/>
+                    <a:p>
+                      <a:pPr/>
+                      <a:r>
+                        <a:rPr lang="en-US" sz="1200" dirty="0">
+                          <a:latin typeface="Calibri"/>
+                        </a:rPr>
+                        <a:t>Tools</a:t>
+                      </a:r>
+                    </a:p>
+                  </a:txBody>
+                  <a:tcPr marL="54000" marR="54000" marT="24000" marB="24000" anchor="ctr"/>
+                </a:tc>
+                <a:tc>
+                  <a:txBody>
+                    <a:bodyPr/>
+                    <a:lstStyle/>
+                    <a:p>
+                      <a:pPr/>
+                      <a:r>
+                        <a:rPr lang="en-US" sz="1200" dirty="0">
+                          <a:latin typeface="Calibri"/>
+                        </a:rPr>
+                        <a:t>Git + GitHub, VS Code</a:t>
+                      </a:r>
+                    </a:p>
+                  </a:txBody>
+                  <a:tcPr marL="54000" marR="54000" marT="24000" marB="24000" anchor="ctr"/>
+                </a:tc>
+              </a:tr>
+              <a:tr h="470000">
+                <a:tc>
+                  <a:txBody>
+                    <a:bodyPr/>
+                    <a:lstStyle/>
+                    <a:p>
+                      <a:pPr/>
+                      <a:r>
+                        <a:rPr lang="en-US" sz="1200" dirty="0">
+                          <a:latin typeface="Calibri"/>
+                        </a:rPr>
+                        <a:t>Deployment</a:t>
+                      </a:r>
+                    </a:p>
+                  </a:txBody>
+                  <a:tcPr marL="54000" marR="54000" marT="24000" marB="24000" anchor="ctr"/>
+                </a:tc>
+                <a:tc>
+                  <a:txBody>
+                    <a:bodyPr/>
+                    <a:lstStyle/>
+                    <a:p>
+                      <a:pPr/>
+                      <a:r>
+                        <a:rPr lang="en-US" sz="1200" dirty="0">
+                          <a:latin typeface="Calibri"/>
+                        </a:rPr>
+                        <a:t>Free-tier cloud: Render (app) + Neon (managed PostgreSQL) — no special hardware</a:t>
+                      </a:r>
+                    </a:p>
+                  </a:txBody>
+                  <a:tcPr marL="54000" marR="54000" marT="24000" marB="24000" anchor="ctr"/>
+                </a:tc>
+              </a:tr>
+            </a:tbl>
+          </a:graphicData>
+        </a:graphic>
+      </p:graphicFrame>
+    </p:spTree>
   </p:cSld>
   <p:clrMapOvr>
     <a:masterClrMapping/>
